--- a/it/slides/19-Architettura_dei_Calcolatori-Istruzioni_e_Interruzioni.pptx
+++ b/it/slides/19-Architettura_dei_Calcolatori-Istruzioni_e_Interruzioni.pptx
@@ -126,26 +126,26 @@
   <p:extLst>
     <p:ext uri="{521415D9-36F7-43E2-AB2F-B90AF26B5E84}">
       <p14:sectionLst xmlns:p14="http://schemas.microsoft.com/office/powerpoint/2010/main">
-        <p14:section name="Apertura" id="{e4b6538b-81d6-d375-6412-d8e7fe4cf208}">
+        <p14:section name="Apertura" id="{2f501c9f-69d7-4bf5-c606-9406f03e9fac}">
           <p14:sldIdLst>
             <p14:sldId id="256"/>
             <p14:sldId id="257"/>
           </p14:sldIdLst>
         </p14:section>
-        <p14:section name="Istruzioni" id="{db4ed641-59a5-fe2a-60a3-f103ff9b2a03}">
+        <p14:section name="Istruzioni" id="{0a902bfc-e159-d67c-c09c-f0adf7224c15}">
           <p14:sldIdLst>
             <p14:sldId id="258"/>
             <p14:sldId id="259"/>
             <p14:sldId id="260"/>
           </p14:sldIdLst>
         </p14:section>
-        <p14:section name="Il ciclo del processore" id="{aeda4369-b59c-158d-83de-129efd0c6c9f}">
+        <p14:section name="Il ciclo del processore" id="{3d1b82c5-28c7-d05c-d90e-39b367a6fb55}">
           <p14:sldIdLst>
             <p14:sldId id="261"/>
             <p14:sldId id="262"/>
           </p14:sldIdLst>
         </p14:section>
-        <p14:section name="Interruzioni" id="{32fa2c4d-f875-615e-4bb8-6b637bbe0a44}">
+        <p14:section name="Interruzioni" id="{4d874252-053d-3865-226d-1afc9151b1cb}">
           <p14:sldIdLst>
             <p14:sldId id="263"/>
             <p14:sldId id="264"/>
@@ -154,7 +154,7 @@
             <p14:sldId id="267"/>
           </p14:sldIdLst>
         </p14:section>
-        <p14:section name="La soluzione di RISC-V" id="{bc051e5e-f9b7-a73a-0dfd-e323ce2bd05d}">
+        <p14:section name="La soluzione di RISC-V" id="{dc531599-2a2a-1c6e-4248-bdf1999ef8ba}">
           <p14:sldIdLst>
             <p14:sldId id="268"/>
             <p14:sldId id="269"/>
@@ -1640,7 +1640,7 @@
           <a:p>
             <a:r>
               <a:rPr lang="en-US" dirty="0"/>
-              <a:t>Cinque conclusioni. Un'istruzione è un codice operativo con i suoi operandi; in RISC-V sempre 32 bit in sei formati regolari. La lunghezza delle istruzioni determina come si muove il PC. Il processore ha un ciclo: preleva, decodifica, esegue, scrive il risultato. Gli eventi eccezionali spezzano il ciclo: il processore salva dov'era, serve l'evento e riprende. Le interruzioni si possono abilitare, mascherare e ordinare per priorità, e RISC-V lo fa con una manciata di registri e mret. La prossima lezione lascia il processore per i bus e la scheda video.
+              <a:t>Cinque conclusioni. Un'istruzione è un codice operativo con i suoi operandi; in RISC-V sempre 32 bit in sei formati regolari. La lunghezza fissa rende semplice il prelievo: il PC avanza di una costante, 4 per un'istruzione non compressa. Il processore ha un ciclo: preleva, decodifica, esegue, scrive il risultato. Gli eventi eccezionali spezzano il ciclo: il processore salva dov'era, serve l'evento e riprende. Le interruzioni si possono abilitare, mascherare e ordinare per priorità, e RISC-V lo fa con una manciata di registri e mret. La prossima lezione lascia il processore per i bus e la scheda video.
 Per il docente: Le conclusioni originali affermavano che «l'interrupt è un segnale non mascherabile»: la maggior parte delle interruzioni si può mascherare; solo poche no. Prossima lezione: i bus e la scheda video.</a:t>
             </a:r>
             <a:endParaRPr lang="en-US" dirty="0"/>
@@ -3294,7 +3294,63 @@
       </p:sp>
       <p:sp>
         <p:nvSpPr>
-          <p:cNvPr id="12" name="Shape 10"/>
+          <p:cNvPr id="12" name="Text 10"/>
+          <p:cNvSpPr txBox="1"/>
+          <p:nvPr/>
+        </p:nvSpPr>
+        <p:spPr>
+          <a:xfrm>
+            <a:off x="4693615" y="566928"/>
+            <a:ext cx="6949440" cy="640080"/>
+          </a:xfrm>
+          <a:prstGeom prst="rect">
+            <a:avLst/>
+          </a:prstGeom>
+          <a:noFill/>
+          <a:ln/>
+        </p:spPr>
+        <p:txBody>
+          <a:bodyPr wrap="square" lIns="0" tIns="0" rIns="0" bIns="0" rtlCol="0" anchor="t"/>
+          <a:lstStyle/>
+          <a:p>
+            <a:pPr algn="r" indent="0" marL="0">
+              <a:buNone/>
+            </a:pPr>
+            <a:r>
+              <a:rPr lang="en-US" sz="1300" dirty="0">
+                <a:solidFill>
+                  <a:srgbClr val="CFE3EA"/>
+                </a:solidFill>
+                <a:latin typeface="Calibri" pitchFamily="34" charset="0"/>
+                <a:ea typeface="Calibri" pitchFamily="34" charset="-122"/>
+                <a:cs typeface="Calibri" pitchFamily="34" charset="-120"/>
+              </a:rPr>
+              <a:t>Presentazione della lezione. I listati, il programma completo e come provarlo sono nella presentazione del codice:</a:t>
+            </a:r>
+            <a:endParaRPr lang="en-US" sz="1300" dirty="0"/>
+          </a:p>
+          <a:p>
+            <a:pPr algn="r" indent="0" marL="0">
+              <a:buNone/>
+            </a:pPr>
+            <a:r>
+              <a:rPr lang="en-US" sz="1300" dirty="0">
+                <a:solidFill>
+                  <a:srgbClr val="CFE3EA"/>
+                </a:solidFill>
+                <a:latin typeface="Calibri" pitchFamily="34" charset="0"/>
+                <a:ea typeface="Calibri" pitchFamily="34" charset="-122"/>
+                <a:cs typeface="Calibri" pitchFamily="34" charset="-120"/>
+              </a:rPr>
+              <a:t>19-Architettura_dei_Calcolatori-Istruzioni_e_Interruzioni-Codice.pptx</a:t>
+            </a:r>
+            <a:endParaRPr lang="en-US" sz="1300" dirty="0"/>
+          </a:p>
+        </p:txBody>
+      </p:sp>
+      <p:sp>
+        <p:nvSpPr>
+          <p:cNvPr id="13" name="Shape 11"/>
           <p:cNvSpPr/>
           <p:nvPr/>
         </p:nvSpPr>
@@ -3321,7 +3377,7 @@
       </p:sp>
       <p:pic>
         <p:nvPicPr>
-          <p:cNvPr id="13" name="Image 0" descr="/Users/raffaelemontella/devel/riscv-prg32/computer-architecture-with-prg32/tools/assets/game_asteroids.png">    </p:cNvPr>
+          <p:cNvPr id="14" name="Image 0" descr="/Users/raffaelemontella/devel/riscv-prg32/computer-architecture-with-prg32/tools/assets/game_asteroids.png">    </p:cNvPr>
           <p:cNvPicPr>
             <a:picLocks noChangeAspect="1"/>
           </p:cNvPicPr>
@@ -15753,7 +15809,7 @@
         </p:nvSpPr>
         <p:spPr>
           <a:xfrm>
-            <a:off x="548640" y="1500505"/>
+            <a:off x="548640" y="1492758"/>
             <a:ext cx="146304" cy="146304"/>
           </a:xfrm>
           <a:prstGeom prst="rect">
@@ -15779,7 +15835,7 @@
         <p:spPr>
           <a:xfrm>
             <a:off x="932688" y="1417320"/>
-            <a:ext cx="10710367" cy="588772"/>
+            <a:ext cx="10710367" cy="557784"/>
           </a:xfrm>
           <a:prstGeom prst="rect">
             <a:avLst/>
@@ -15798,7 +15854,7 @@
               <a:buNone/>
             </a:pPr>
             <a:r>
-              <a:rPr lang="en-US" sz="1900" dirty="0">
+              <a:rPr lang="en-US" sz="1800" dirty="0">
                 <a:solidFill>
                   <a:srgbClr val="1B2530"/>
                 </a:solidFill>
@@ -15808,7 +15864,7 @@
               </a:rPr>
               <a:t>Un'istruzione è un codice operativo e zero, uno o più operandi; in RISC-V è sempre di 32 bit, in sei formati regolari</a:t>
             </a:r>
-            <a:endParaRPr lang="en-US" sz="1900" dirty="0"/>
+            <a:endParaRPr lang="en-US" sz="1800" dirty="0"/>
           </a:p>
         </p:txBody>
       </p:sp>
@@ -15820,7 +15876,7 @@
         </p:nvSpPr>
         <p:spPr>
           <a:xfrm>
-            <a:off x="548640" y="2231212"/>
+            <a:off x="548640" y="2226564"/>
             <a:ext cx="146304" cy="146304"/>
           </a:xfrm>
           <a:prstGeom prst="rect">
@@ -15845,8 +15901,8 @@
         </p:nvSpPr>
         <p:spPr>
           <a:xfrm>
-            <a:off x="932688" y="2148027"/>
-            <a:ext cx="10710367" cy="294386"/>
+            <a:off x="932688" y="2151126"/>
+            <a:ext cx="10710367" cy="557784"/>
           </a:xfrm>
           <a:prstGeom prst="rect">
             <a:avLst/>
@@ -15865,7 +15921,7 @@
               <a:buNone/>
             </a:pPr>
             <a:r>
-              <a:rPr lang="en-US" sz="1900" dirty="0">
+              <a:rPr lang="en-US" sz="1800" dirty="0">
                 <a:solidFill>
                   <a:srgbClr val="1B2530"/>
                 </a:solidFill>
@@ -15873,9 +15929,9 @@
                 <a:ea typeface="Calibri" pitchFamily="34" charset="-122"/>
                 <a:cs typeface="Calibri" pitchFamily="34" charset="-120"/>
               </a:rPr>
-              <a:t>La lunghezza delle istruzioni, fissa o variabile, determina il comportamento del PC</a:t>
+              <a:t>La lunghezza fissa rende semplice il prelievo: il PC avanza di una costante, 4 per un'istruzione non compressa</a:t>
             </a:r>
-            <a:endParaRPr lang="en-US" sz="1900" dirty="0"/>
+            <a:endParaRPr lang="en-US" sz="1800" dirty="0"/>
           </a:p>
         </p:txBody>
       </p:sp>
@@ -15887,7 +15943,7 @@
         </p:nvSpPr>
         <p:spPr>
           <a:xfrm>
-            <a:off x="548640" y="2667533"/>
+            <a:off x="548640" y="2960370"/>
             <a:ext cx="146304" cy="146304"/>
           </a:xfrm>
           <a:prstGeom prst="rect">
@@ -15912,8 +15968,8 @@
         </p:nvSpPr>
         <p:spPr>
           <a:xfrm>
-            <a:off x="932688" y="2584348"/>
-            <a:ext cx="10710367" cy="588772"/>
+            <a:off x="932688" y="2884932"/>
+            <a:ext cx="10710367" cy="557784"/>
           </a:xfrm>
           <a:prstGeom prst="rect">
             <a:avLst/>
@@ -15932,7 +15988,7 @@
               <a:buNone/>
             </a:pPr>
             <a:r>
-              <a:rPr lang="en-US" sz="1900" dirty="0">
+              <a:rPr lang="en-US" sz="1800" dirty="0">
                 <a:solidFill>
                   <a:srgbClr val="1B2530"/>
                 </a:solidFill>
@@ -15942,7 +15998,7 @@
               </a:rPr>
               <a:t>Il processore ha un ciclo: preleva un'istruzione, la decodifica, la esegue, e scrive il risultato</a:t>
             </a:r>
-            <a:endParaRPr lang="en-US" sz="1900" dirty="0"/>
+            <a:endParaRPr lang="en-US" sz="1800" dirty="0"/>
           </a:p>
         </p:txBody>
       </p:sp>
@@ -15954,7 +16010,7 @@
         </p:nvSpPr>
         <p:spPr>
           <a:xfrm>
-            <a:off x="548640" y="3398241"/>
+            <a:off x="548640" y="3694176"/>
             <a:ext cx="146304" cy="146304"/>
           </a:xfrm>
           <a:prstGeom prst="rect">
@@ -15979,8 +16035,8 @@
         </p:nvSpPr>
         <p:spPr>
           <a:xfrm>
-            <a:off x="932688" y="3315056"/>
-            <a:ext cx="10710367" cy="588772"/>
+            <a:off x="932688" y="3618738"/>
+            <a:ext cx="10710367" cy="557784"/>
           </a:xfrm>
           <a:prstGeom prst="rect">
             <a:avLst/>
@@ -15999,7 +16055,7 @@
               <a:buNone/>
             </a:pPr>
             <a:r>
-              <a:rPr lang="en-US" sz="1900" dirty="0">
+              <a:rPr lang="en-US" sz="1800" dirty="0">
                 <a:solidFill>
                   <a:srgbClr val="1B2530"/>
                 </a:solidFill>
@@ -16009,7 +16065,7 @@
               </a:rPr>
               <a:t>Gli eventi eccezionali spezzano il ciclo: il processore salva dov'era, serve l'evento e riprende</a:t>
             </a:r>
-            <a:endParaRPr lang="en-US" sz="1900" dirty="0"/>
+            <a:endParaRPr lang="en-US" sz="1800" dirty="0"/>
           </a:p>
         </p:txBody>
       </p:sp>
@@ -16021,7 +16077,7 @@
         </p:nvSpPr>
         <p:spPr>
           <a:xfrm>
-            <a:off x="548640" y="4128948"/>
+            <a:off x="548640" y="4427982"/>
             <a:ext cx="146304" cy="146304"/>
           </a:xfrm>
           <a:prstGeom prst="rect">
@@ -16046,8 +16102,8 @@
         </p:nvSpPr>
         <p:spPr>
           <a:xfrm>
-            <a:off x="932688" y="4045763"/>
-            <a:ext cx="10710367" cy="588772"/>
+            <a:off x="932688" y="4352544"/>
+            <a:ext cx="10710367" cy="557784"/>
           </a:xfrm>
           <a:prstGeom prst="rect">
             <a:avLst/>
@@ -16066,7 +16122,7 @@
               <a:buNone/>
             </a:pPr>
             <a:r>
-              <a:rPr lang="en-US" sz="1900" dirty="0">
+              <a:rPr lang="en-US" sz="1800" dirty="0">
                 <a:solidFill>
                   <a:srgbClr val="1B2530"/>
                 </a:solidFill>
@@ -16076,7 +16132,7 @@
               </a:rPr>
               <a:t>Le interruzioni si possono abilitare, mascherare e ordinare per priorità; RISC-V lo fa con una manciata di registri e l'istruzione mret</a:t>
             </a:r>
-            <a:endParaRPr lang="en-US" sz="1900" dirty="0"/>
+            <a:endParaRPr lang="en-US" sz="1800" dirty="0"/>
           </a:p>
         </p:txBody>
       </p:sp>
@@ -16088,7 +16144,7 @@
         </p:nvSpPr>
         <p:spPr>
           <a:xfrm>
-            <a:off x="548640" y="4859655"/>
+            <a:off x="548640" y="5161788"/>
             <a:ext cx="146304" cy="146304"/>
           </a:xfrm>
           <a:prstGeom prst="rect">
@@ -16113,8 +16169,8 @@
         </p:nvSpPr>
         <p:spPr>
           <a:xfrm>
-            <a:off x="932688" y="4776470"/>
-            <a:ext cx="10710367" cy="1395730"/>
+            <a:off x="932688" y="5086350"/>
+            <a:ext cx="10710367" cy="1085850"/>
           </a:xfrm>
           <a:prstGeom prst="rect">
             <a:avLst/>
@@ -16133,7 +16189,7 @@
               <a:buNone/>
             </a:pPr>
             <a:r>
-              <a:rPr lang="en-US" sz="1900" dirty="0">
+              <a:rPr lang="en-US" sz="1800" dirty="0">
                 <a:solidFill>
                   <a:srgbClr val="1B2530"/>
                 </a:solidFill>
@@ -16143,7 +16199,7 @@
               </a:rPr>
               <a:t>Letture</a:t>
             </a:r>
-            <a:endParaRPr lang="en-US" sz="1900" dirty="0"/>
+            <a:endParaRPr lang="en-US" sz="1800" dirty="0"/>
           </a:p>
           <a:p>
             <a:pPr indent="0" marL="0">
@@ -16153,7 +16209,7 @@
               <a:buNone/>
             </a:pPr>
             <a:r>
-              <a:rPr lang="en-US" sz="1600" dirty="0">
+              <a:rPr lang="en-US" sz="1500" dirty="0">
                 <a:solidFill>
                   <a:srgbClr val="5B6B78"/>
                 </a:solidFill>
@@ -16163,7 +16219,7 @@
               </a:rPr>
               <a:t>– Patterson, Hennessy: Struttura e progetto dei calcolatori, edizione RISC-V, paragrafi 2.5, 4.1-4.6 e 4.10</a:t>
             </a:r>
-            <a:endParaRPr lang="en-US" sz="1900" dirty="0"/>
+            <a:endParaRPr lang="en-US" sz="1800" dirty="0"/>
           </a:p>
           <a:p>
             <a:pPr indent="0" marL="0">
@@ -16173,7 +16229,7 @@
               <a:buNone/>
             </a:pPr>
             <a:r>
-              <a:rPr lang="en-US" sz="1600" dirty="0">
+              <a:rPr lang="en-US" sz="1500" dirty="0">
                 <a:solidFill>
                   <a:srgbClr val="5B6B78"/>
                 </a:solidFill>
@@ -16183,7 +16239,7 @@
               </a:rPr>
               <a:t>– The RISC-V Instruction Set Manual, volume II: Privileged Architecture</a:t>
             </a:r>
-            <a:endParaRPr lang="en-US" sz="1900" dirty="0"/>
+            <a:endParaRPr lang="en-US" sz="1800" dirty="0"/>
           </a:p>
           <a:p>
             <a:pPr indent="0" marL="0">
@@ -16193,7 +16249,7 @@
               <a:buNone/>
             </a:pPr>
             <a:r>
-              <a:rPr lang="en-US" sz="1600" dirty="0">
+              <a:rPr lang="en-US" sz="1500" dirty="0">
                 <a:solidFill>
                   <a:srgbClr val="5B6B78"/>
                 </a:solidFill>
@@ -16203,7 +16259,7 @@
               </a:rPr>
               <a:t>– Playing with RISC-V, capitolo 4: PRG32-QT e il suo debugger</a:t>
             </a:r>
-            <a:endParaRPr lang="en-US" sz="1900" dirty="0"/>
+            <a:endParaRPr lang="en-US" sz="1800" dirty="0"/>
           </a:p>
         </p:txBody>
       </p:sp>

--- a/it/slides/19-Architettura_dei_Calcolatori-Istruzioni_e_Interruzioni.pptx
+++ b/it/slides/19-Architettura_dei_Calcolatori-Istruzioni_e_Interruzioni.pptx
@@ -126,26 +126,26 @@
   <p:extLst>
     <p:ext uri="{521415D9-36F7-43E2-AB2F-B90AF26B5E84}">
       <p14:sectionLst xmlns:p14="http://schemas.microsoft.com/office/powerpoint/2010/main">
-        <p14:section name="Apertura" id="{2f501c9f-69d7-4bf5-c606-9406f03e9fac}">
+        <p14:section name="Apertura" id="{d61dede6-eca1-78e0-7b5b-55e21dc4a104}">
           <p14:sldIdLst>
             <p14:sldId id="256"/>
             <p14:sldId id="257"/>
           </p14:sldIdLst>
         </p14:section>
-        <p14:section name="Istruzioni" id="{0a902bfc-e159-d67c-c09c-f0adf7224c15}">
+        <p14:section name="Istruzioni" id="{bd41d6e4-125c-0809-ddbc-baf06fd5d7ac}">
           <p14:sldIdLst>
             <p14:sldId id="258"/>
             <p14:sldId id="259"/>
             <p14:sldId id="260"/>
           </p14:sldIdLst>
         </p14:section>
-        <p14:section name="Il ciclo del processore" id="{3d1b82c5-28c7-d05c-d90e-39b367a6fb55}">
+        <p14:section name="Il ciclo del processore" id="{72cbbae5-2c4d-179c-b013-02724e46c97d}">
           <p14:sldIdLst>
             <p14:sldId id="261"/>
             <p14:sldId id="262"/>
           </p14:sldIdLst>
         </p14:section>
-        <p14:section name="Interruzioni" id="{4d874252-053d-3865-226d-1afc9151b1cb}">
+        <p14:section name="Interruzioni" id="{f28e8a87-11ae-dcb7-68ae-f4259f9bc0fa}">
           <p14:sldIdLst>
             <p14:sldId id="263"/>
             <p14:sldId id="264"/>
@@ -154,7 +154,7 @@
             <p14:sldId id="267"/>
           </p14:sldIdLst>
         </p14:section>
-        <p14:section name="La soluzione di RISC-V" id="{dc531599-2a2a-1c6e-4248-bdf1999ef8ba}">
+        <p14:section name="La soluzione di RISC-V" id="{86d55fb1-c8fb-8d24-4585-fdebb4a79d00}">
           <p14:sldIdLst>
             <p14:sldId id="268"/>
             <p14:sldId id="269"/>
@@ -571,6 +571,8 @@
             <a:r>
               <a:rPr lang="en-US" dirty="0"/>
               <a:t>La lezione precedente ha descritto di che cosa è fatto un processore. Questa descrive che cosa fa. Ha due metà. La prima segue una singola istruzione: come è codificata in 32 bit e quali passi compie il processore per eseguirla. La seconda spiega che cosa succede quando arriva qualcosa di più urgente del programma in corso, un timer, un dispositivo, un errore, e il processore deve lasciare ciò che sta facendo e tornarci dopo. La battuta in copertina è quasi vera, come vedrete.
+Stato di apprendimento: DA COMPRENDERE OGGI, alla fine di questa lezione lo spiegate, lo seguite passo passo e lo applicate da soli; DA UTILIZZARE OGGI, oggi seguite e usate la ricetta; come funziona dentro si spiega più avanti, o non fa parte del corso; DA COMPRENDERE PIÙ AVANTI, riconoscete il nome e lo scopo; lo spiega una lezione successiva. Una slide senza etichetta è contesto: una storia, un esempio, una domanda, un esercizio.
+Stato di apprendimento di questa lezione. DA COMPRENDERE OGGI: formati delle istruzioni; i modi di indirizzamento; il ciclo del processore; interruzioni e trap. DA UTILIZZARE OGGI: il programma completo, gli strumenti di PRG32 (si usa, non si studia, in questo corso). DA COMPRENDERE PIÙ AVANTI: niente. Una slide senza etichetta è contesto: una storia, un esempio, una domanda, un esercizio.
 Per il docente: La presentazione originale usava una macchina a parole di 16 bit per la fase di fetch e il Motorola MC68000 per interruzioni vettorizzate e priorità. Entrambi sono sostituiti da RISC-V: i sei formati di istruzione, i cinque stadi classici, e il meccanismo delle trap in modo macchina (mtvec, mepc, mcause, mstatus, mret). Una slide di confronto conserva il 68000 come controparte storica.</a:t>
             </a:r>
             <a:endParaRPr lang="en-US" dirty="0"/>
@@ -660,6 +662,7 @@
             <a:r>
               <a:rPr lang="en-US" dirty="0"/>
               <a:t>Il ciclo reale. Dopo il bootstrap il processore preleva, decodifica ed esegue; poi, alla fine di ogni istruzione, controlla se c'è un'interruzione in attesa. Se no, torna al prelievo. Se sì, accoglie la trap: passa allo stato privilegiato e comincia a eseguire una routine del sistema, il gestore. Quando il gestore termina, il programma sospeso riprende come se nulla fosse accaduto. Seguite i due percorsi sul diagramma: l'anello corto è il caso normale.
+DA COMPRENDERE OGGI: interruzioni e trap.
 Per il docente: Ciclo del processore reale. In RISC-V lo «stato supervisore» è il modo macchina, e la prima istruzione prelevata dopo la trap è quella all'indirizzo contenuto in mtvec.</a:t>
             </a:r>
             <a:endParaRPr lang="en-US" dirty="0"/>
@@ -749,6 +752,7 @@
             <a:r>
               <a:rPr lang="en-US" dirty="0"/>
               <a:t>Sei cause di interruzione. Un'interruzione periodica da un timer, per ripartire il processore tra i programmi. Un'interruzione di I/O, con cui una periferica segnala di essere pronta. Gli errori nel programma, come un'istruzione inesistente: sono le eccezioni. I guasti del sistema: alimentazione, temperatura. Il reset, che riporta tutto a uno stato noto. E l'interruzione software, con cui un programma chiede un servizio al sistema operativo: in RISC-V è l'istruzione ecall.
+DA COMPRENDERE OGGI: interruzioni e trap.
 Per il docente: La presentazione originale elenca l'overflow aritmetico tra gli errori di programma: in RISC-V l'overflow intero non solleva eccezioni (Lezione 05). ecall, environment call, è sincrona rispetto al programma che la esegue.</a:t>
             </a:r>
             <a:endParaRPr lang="en-US" dirty="0"/>
@@ -838,6 +842,7 @@
             <a:r>
               <a:rPr lang="en-US" dirty="0"/>
               <a:t>La procedura generale in sei passi. Salvare il contesto, parte hardware: almeno l'indirizzo da cui riprendere. Identificare la causa. Saltare al punto d'ingresso della routine di servizio dell'interruzione. Salvare il contesto, parte software: i registri che la routine sta per usare. Servire l'interruzione. Infine ripristinare il contesto e riprendere il programma sospeso dall'istruzione successiva all'ultima eseguita. Il contesto è tutto ciò che il programma interrotto deve ritrovare immutato.
+DA COMPRENDERE OGGI: interruzioni e trap.
 Per il docente: Gestione delle interruzioni. Lo stato da salvare e ripristinare: PC, stato, e i registri. Il salvataggio si può fare in parte o del tutto in hardware o in software; RISC-V fa il minimo in hardware. Con più dispositivi il processore deve identificare chi ha interrotto e, per richieste simultanee, applicare una priorità.</a:t>
             </a:r>
             <a:endParaRPr lang="en-US" dirty="0"/>
@@ -927,6 +932,7 @@
             <a:r>
               <a:rPr lang="en-US" dirty="0"/>
               <a:t>Sei registri. mtvec, scritto una volta dal firmware, contiene l'indirizzo del gestore delle trap. mstatus contiene MIE, l'abilitazione globale delle interruzioni, e MPIE, il suo valore precedente. mie ha un bit di abilitazione per ogni sorgente, mip un bit di richiesta in attesa per ogni sorgente. mepc riceve, a ogni trap, l'indirizzo dell'istruzione interrotta. mcause riceve la causa. La colonna centrale è importante: alcuni registri li scrive il firmware per configurare il meccanismo, altri l'hardware quando avviene una trap.
+DA COMPRENDERE OGGI: interruzioni e trap.
 Per il docente: Registri di controllo e stato del modo macchina (Lezione 18). Un'interruzione viene accolta solo se il suo bit è a 1 sia in mip sia in mie e MIE vale 1.</a:t>
             </a:r>
             <a:endParaRPr lang="en-US" dirty="0"/>
@@ -1016,6 +1022,7 @@
             <a:r>
               <a:rPr lang="en-US" dirty="0"/>
               <a:t>Che cosa fa l'hardware a una trap, in ordine. Scrive in mepc l'indirizzo dell'istruzione interrotta. Scrive la causa in mcause. Copia MIE in MPIE e azzera MIE, così le altre interruzioni sono disabilitate. Passa al modo macchina. Carica nel PC l'indirizzo contenuto in mtvec. Nulla viene salvato su uno stack: i registri generici sono lasciati al gestore. L'istruzione mret, alla fine del gestore, annulla tutto: MIE riprende il valore di MPIE e il PC quello di mepc.
+DA COMPRENDERE OGGI: interruzioni e trap.
 Per il docente: L'hardware non mette nulla su uno stack: il salvataggio dei registri generici è lasciato al gestore. È il «salvataggio hardware del contesto» dello schema generale, ridotto a due registri e un bit.</a:t>
             </a:r>
             <a:endParaRPr lang="en-US" dirty="0"/>
@@ -1105,6 +1112,7 @@
             <a:r>
               <a:rPr lang="en-US" dirty="0"/>
               <a:t>Il contenuto di mcause. Il bit più alto dice se è stata un'interruzione o un'eccezione; il resto è un codice. Le tre interruzioni, evidenziate: software, timer, ed esterna, cioè un dispositivo. Tra le eccezioni: istruzione illegale, breakpoint, errore di accesso in un load o in uno store, ed ecall. Lo stesso numero può comparire in entrambe le famiglie con significati diversi, ed è per questo che serve il bit più alto. La riga del breakpoint spiega come un debugger, per esempio quello di PRG32-QT, ferma il vostro programma.
+DA COMPRENDERE OGGI: interruzioni e trap.
 Per il docente: I codici standard della specifica privilegiata; i chip ne aggiungono di propri. Lo stesso codice 3 significa cose diverse per interruzioni ed eccezioni: le distingue il bit più alto di mcause. Con mtvec in modo vettorizzato, un'interruzione del timer entra a base + 4 x 7.</a:t>
             </a:r>
             <a:endParaRPr lang="en-US" dirty="0"/>
@@ -1194,6 +1202,7 @@
             <a:r>
               <a:rPr lang="en-US" dirty="0"/>
               <a:t>Tutto questo succede sul kit. Un timer interrompe il processore cento volte al secondo, e il firmware lo usa per tenere il tempo e cadenzare i frame. Il display e l'audio interrompono quando vogliono altri dati. La radio interrompe quando arriva un pacchetto, ed è per questo che potete caricare una cartuccia mentre un gioco è in esecuzione. Le vostre init, update e draw sono normali funzioni che girano tra un'interruzione e l'altra. E una cartuccia bloccata in un ciclo non ferma le interruzioni: PRG32-QT segnala un errore; sulla scheda un watchdog segnala lo stallo.
+DA COMPRENDERE OGGI: interruzioni e trap.
 Per il docente: I tre problemi del ciclo semplice (I/O inefficiente, programmi fuori controllo, controllo limitato) e la loro soluzione, tutti visibili sul kit. Verificato sui sorgenti e sulla configurazione del firmware (non su una scheda fisica): la cartuccia gira in modo nativo dentro il task principale, nello stesso modo di privilegio del firmware; FreeRTOS ha un tick a 100 Hz; il task watchdog (5 s, sorveglia il task idle) stampa soltanto un avviso sulla porta seriale, perché l'opzione panic è spenta, quindi una cartuccia bloccata trattiene il lock della cartuccia e il kit va resettato. Una cartuccia che disabilitasse le interruzioni farebbe invece scattare l'interrupt watchdog (300 ms), che va in panic e riavvia il chip. Eseguito su PRG32-QT: un ciclo senza fine dà «instruction budget exhausted», una scrittura in mstatus dà «unsupported CSR». In PRG32-QT un breakpoint è l'eccezione con codice 3.</a:t>
             </a:r>
             <a:endParaRPr lang="en-US" dirty="0"/>
@@ -1641,6 +1650,7 @@
             <a:r>
               <a:rPr lang="en-US" dirty="0"/>
               <a:t>Cinque conclusioni. Un'istruzione è un codice operativo con i suoi operandi; in RISC-V sempre 32 bit in sei formati regolari. La lunghezza fissa rende semplice il prelievo: il PC avanza di una costante, 4 per un'istruzione non compressa. Il processore ha un ciclo: preleva, decodifica, esegue, scrive il risultato. Gli eventi eccezionali spezzano il ciclo: il processore salva dov'era, serve l'evento e riprende. Le interruzioni si possono abilitare, mascherare e ordinare per priorità, e RISC-V lo fa con una manciata di registri e mret. La prossima lezione lascia il processore per i bus e la scheda video.
+Stato di apprendimento, riepilogo. DA COMPRENDERE OGGI: formati delle istruzioni; i modi di indirizzamento; il ciclo del processore; interruzioni e trap. DA UTILIZZARE OGGI: il programma completo, gli strumenti di PRG32 (si usa, non si studia, in questo corso). DA COMPRENDERE PIÙ AVANTI: niente. Una slide senza etichetta è contesto: una storia, un esempio, una domanda, un esercizio.
 Per il docente: Le conclusioni originali affermavano che «l'interrupt è un segnale non mascherabile»: la maggior parte delle interruzioni si può mascherare; solo poche no. Prossima lezione: i bus e la scheda video.</a:t>
             </a:r>
             <a:endParaRPr lang="en-US" dirty="0"/>
@@ -1730,6 +1740,7 @@
             <a:r>
               <a:rPr lang="en-US" dirty="0"/>
               <a:t>Ogni processore ha quattro famiglie di istruzioni: trasferimenti tra memoria e registri, aritmetica e logica, controllo del flusso, ingresso/uscita. Un'istruzione è un codice operativo, l'opcode, che dice che cosa fare, seguito da zero o più operandi, che dicono su che cosa. Un operando può essere una costante scritta dentro l'istruzione, un immediato; una locazione di memoria; oppure un registro. Alcuni operandi sono impliciti: una macchina ad accumulatore non nomina l'accumulatore. Le istruzioni hanno da zero a tre operandi.
+DA COMPRENDERE OGGI: formati delle istruzioni.
 Per il docente: In RISC-V la quarta famiglia non esiste come tale: i dispositivi sono memoria (Lezione 15). add ha tre operandi, tutti registri; ret non ne ha di visibili.</a:t>
             </a:r>
             <a:endParaRPr lang="en-US" dirty="0"/>
@@ -1819,6 +1830,7 @@
             <a:r>
               <a:rPr lang="en-US" dirty="0"/>
               <a:t>I formati di RISC-V. Tutte le istruzioni sono lunghe 32 bit, divisi in campi. Nel formato R, per le operazioni tra registri, ci sono tre numeri di registro di cinque bit, rs1, rs2 e rd, e tre campi che selezionano l'operazione. Nel formato I il secondo registro sorgente è sostituito da un immediato di 12 bit. S e B, per store e salti condizionati, spezzano l'immediato in due parti. U e J portano un immediato di 20 bit. Notate la regolarità: l'opcode sta sempre nei sette bit più bassi, e i registri sempre nelle stesse posizioni.
+DA COMPRENDERE OGGI: formati delle istruzioni.
 Per il docente: Bit da 31 a 0, da sinistra a destra (indici mostrati sulla prima riga). B e J differiscono da S e U solo per come sono disposti i bit dell'immediato. Questa regolarità è il cuore dell'idea RISC; i formati generici a 0, 1, 2 e 3 operandi della presentazione originale ne sono gli antenati.</a:t>
             </a:r>
             <a:endParaRPr lang="en-US" dirty="0"/>
@@ -1908,6 +1920,7 @@
             <a:r>
               <a:rPr lang="en-US" dirty="0"/>
               <a:t>Un modo di indirizzamento è un modo di trovare un operando. RISC-V ne ha quattro. Immediato: l'operando è una costante dentro l'istruzione. Registro: è il contenuto di un registro. Base più scostamento: è la parola di memoria all'indirizzo dato da un registro più una costante, l'unico modo di raggiungere la memoria. Relativo al PC: un indirizzo a una certa distanza dall'istruzione stessa, usato dai salti. L'indirizzamento indiretto in memoria, in cui l'indirizzo stesso sta in memoria, non esiste: richiede due load.
+DA COMPRENDERE OGGI: i modi di indirizzamento.
 Per il docente: RISC-V ha solo i primi quattro. Un processore CISC come l'MC68000 ne ha una dozzina, compresi i modi indiretti in memoria e con autoincremento. L'esempio della presentazione originale, R3 := M[M[A]], in RISC-V diventa: lw t0, 0(t1) seguita da lw t0, 0(t0). La fase di «operand assembly» di un processore CISC è il prezzo dei modi di indirizzamento ricchi.</a:t>
             </a:r>
             <a:endParaRPr lang="en-US" dirty="0"/>
@@ -1997,6 +2010,7 @@
             <a:r>
               <a:rPr lang="en-US" dirty="0"/>
               <a:t>Cinque fasi. Prelievo (fetch): l'istruzione all'indirizzo contenuto nel PC viene letta dalla memoria, e il PC avanza. Decodifica: l'opcode viene riconosciuto e i registri nominati nell'istruzione vengono letti. Esecuzione: la ALU calcola un risultato, un indirizzo o un confronto. Memoria: i load leggono la memoria, gli store la scrivono, le altre istruzioni qui non fanno nulla. Scrittura (write back): il risultato viene scritto nel registro di destinazione. Dopo il bootstrap iniziale, il processore ripete questo ciclo all'infinito.
+DA COMPRENDERE OGGI: il ciclo del processore.
 Per il docente: Algoritmo fondamentale del processore: inizializzazione, instruction fetch and decoding, operand assembly, execute. La versione a cinque fasi è la formulazione RISC classica. In inglese: fetch, decode, execute, memory, write back.</a:t>
             </a:r>
             <a:endParaRPr lang="en-US" dirty="0"/>
@@ -2086,6 +2100,7 @@
             <a:r>
               <a:rPr lang="en-US" dirty="0"/>
               <a:t>Se ogni fase ha il proprio hardware, le fasi di istruzioni diverse possono sovrapporsi. Nella tabella ogni riga è un'istruzione e ogni colonna un ciclo di clock: mentre la prima istruzione è in esecuzione, la seconda viene decodificata e la terza prelevata. Ogni istruzione impiega ancora cinque cicli, ma a ogni ciclo ne termina una: è la pipeline, la stessa idea di una catena di montaggio. I processori superscalari affiancano più pipeline. Il core principale del kit ha una pipeline a quattro stadi.
+DA COMPRENDERE OGGI: il ciclo del processore.
 Per il docente: Slide di origine: «Esempio di pipeline lineare a 5 stadi; superscalarità». IF instruction fetch (prelievo), ID decode (decodifica), EX execute (esecuzione), MEM memory (memoria), WB write back (scrittura). I salti e le dipendenze tra istruzioni vicine complicano il quadro (hazard): è l'argomento di un corso avanzato.</a:t>
             </a:r>
             <a:endParaRPr lang="en-US" dirty="0"/>
@@ -2175,6 +2190,7 @@
             <a:r>
               <a:rPr lang="en-US" dirty="0"/>
               <a:t>Un processore che facesse solo prelievo, decodifica ed esecuzione avrebbe tre problemi. La comunicazione con i dispositivi sarebbe inefficiente: il programma dovrebbe chiedere di continuo a ogni dispositivo se ha qualcosa da dire. Un programma entrato per errore in un ciclo senza fine, come il j loop della slide, non potrebbe mai essere rimosso. E il sistema operativo avrebbe poco controllo sulla macchina. Tutti e tre hanno la stessa soluzione: un modo per togliere il processore al programma in esecuzione.
+DA COMPRENDERE OGGI: interruzioni e trap.
 Per il docente: Slide di origine: «Ciclo del processore semplificato»: bootstrap, fetch, operand assembly, execute.</a:t>
             </a:r>
             <a:endParaRPr lang="en-US" dirty="0"/>
@@ -2264,6 +2280,7 @@
             <a:r>
               <a:rPr lang="en-US" dirty="0"/>
               <a:t>La definizione: le interruzioni sono eventi eccezionali, di solito asincroni rispetto al programma in esecuzione, che richiedono l'attenzione del processore. RISC-V usa tre parole distinte. Un'interruzione (interrupt) viene dall'esterno del programma, in un momento qualunque: un timer, un dispositivo. Un'eccezione è causata dall'istruzione in esecuzione: un opcode illegale, un indirizzo vietato. Una trap è il trasferimento del controllo a un gestore, qualunque ne sia la causa. Altri processori usano queste parole con meno rigore.
+DA COMPRENDERE OGGI: interruzioni e trap.
 Per il docente: Interrupt o interruzioni. I processori più vecchi e la presentazione originale chiamano «trap» gli eventi sincroni e usano «interrupt» per tutto; la specifica RISC-V usa le tre parole con precisione.</a:t>
             </a:r>
             <a:endParaRPr lang="en-US" dirty="0"/>
@@ -3401,6 +3418,420 @@
       </p:pic>
       <p:sp>
         <p:nvSpPr>
+          <p:cNvPr id="15" name="Shape 12"/>
+          <p:cNvSpPr/>
+          <p:nvPr/>
+        </p:nvSpPr>
+        <p:spPr>
+          <a:xfrm>
+            <a:off x="8910777" y="91440"/>
+            <a:ext cx="2732278" cy="274320"/>
+          </a:xfrm>
+          <a:prstGeom prst="rect">
+            <a:avLst/>
+          </a:prstGeom>
+          <a:solidFill>
+            <a:srgbClr val="F3E8FF"/>
+          </a:solidFill>
+          <a:ln w="12700">
+            <a:solidFill>
+              <a:srgbClr val="7E22CE"/>
+            </a:solidFill>
+            <a:prstDash val="dash"/>
+          </a:ln>
+        </p:spPr>
+      </p:sp>
+      <p:sp>
+        <p:nvSpPr>
+          <p:cNvPr id="16" name="Shape 13"/>
+          <p:cNvSpPr/>
+          <p:nvPr/>
+        </p:nvSpPr>
+        <p:spPr>
+          <a:xfrm>
+            <a:off x="8938209" y="128016"/>
+            <a:ext cx="45720" cy="45720"/>
+          </a:xfrm>
+          <a:prstGeom prst="rect">
+            <a:avLst/>
+          </a:prstGeom>
+          <a:solidFill>
+            <a:srgbClr val="7E22CE"/>
+          </a:solidFill>
+          <a:ln w="12700">
+            <a:solidFill>
+              <a:srgbClr val="7E22CE"/>
+            </a:solidFill>
+            <a:prstDash val="solid"/>
+          </a:ln>
+        </p:spPr>
+      </p:sp>
+      <p:sp>
+        <p:nvSpPr>
+          <p:cNvPr id="17" name="Shape 14"/>
+          <p:cNvSpPr/>
+          <p:nvPr/>
+        </p:nvSpPr>
+        <p:spPr>
+          <a:xfrm>
+            <a:off x="8938209" y="205740"/>
+            <a:ext cx="45720" cy="45720"/>
+          </a:xfrm>
+          <a:prstGeom prst="rect">
+            <a:avLst/>
+          </a:prstGeom>
+          <a:solidFill>
+            <a:srgbClr val="7E22CE"/>
+          </a:solidFill>
+          <a:ln w="12700">
+            <a:solidFill>
+              <a:srgbClr val="7E22CE"/>
+            </a:solidFill>
+            <a:prstDash val="solid"/>
+          </a:ln>
+        </p:spPr>
+      </p:sp>
+      <p:sp>
+        <p:nvSpPr>
+          <p:cNvPr id="18" name="Shape 15"/>
+          <p:cNvSpPr/>
+          <p:nvPr/>
+        </p:nvSpPr>
+        <p:spPr>
+          <a:xfrm>
+            <a:off x="8938209" y="283464"/>
+            <a:ext cx="45720" cy="45720"/>
+          </a:xfrm>
+          <a:prstGeom prst="rect">
+            <a:avLst/>
+          </a:prstGeom>
+          <a:solidFill>
+            <a:srgbClr val="7E22CE"/>
+          </a:solidFill>
+          <a:ln w="12700">
+            <a:solidFill>
+              <a:srgbClr val="7E22CE"/>
+            </a:solidFill>
+            <a:prstDash val="solid"/>
+          </a:ln>
+        </p:spPr>
+      </p:sp>
+      <p:pic>
+        <p:nvPicPr>
+          <p:cNvPr id="19" name="Image 1" descr="preencoded.png">    </p:cNvPr>
+          <p:cNvPicPr>
+            <a:picLocks noChangeAspect="1"/>
+          </p:cNvPicPr>
+          <p:nvPr/>
+        </p:nvPicPr>
+        <p:blipFill>
+          <a:blip r:embed="rId2"/>
+          <a:stretch>
+            <a:fillRect/>
+          </a:stretch>
+        </p:blipFill>
+        <p:spPr>
+          <a:xfrm>
+            <a:off x="9038793" y="128016"/>
+            <a:ext cx="201168" cy="201168"/>
+          </a:xfrm>
+          <a:prstGeom prst="rect">
+            <a:avLst/>
+          </a:prstGeom>
+        </p:spPr>
+      </p:pic>
+      <p:sp>
+        <p:nvSpPr>
+          <p:cNvPr id="20" name="Text 16"/>
+          <p:cNvSpPr txBox="1"/>
+          <p:nvPr/>
+        </p:nvSpPr>
+        <p:spPr>
+          <a:xfrm>
+            <a:off x="9294825" y="91440"/>
+            <a:ext cx="2311654" cy="274320"/>
+          </a:xfrm>
+          <a:prstGeom prst="rect">
+            <a:avLst/>
+          </a:prstGeom>
+          <a:noFill/>
+          <a:ln/>
+        </p:spPr>
+        <p:txBody>
+          <a:bodyPr wrap="square" lIns="0" tIns="0" rIns="0" bIns="0" rtlCol="0" anchor="ctr"/>
+          <a:lstStyle/>
+          <a:p>
+            <a:pPr indent="0" marL="0">
+              <a:buNone/>
+            </a:pPr>
+            <a:r>
+              <a:rPr lang="en-US" sz="1100" b="1" dirty="0">
+                <a:solidFill>
+                  <a:srgbClr val="6B21A8"/>
+                </a:solidFill>
+                <a:latin typeface="Calibri" pitchFamily="34" charset="0"/>
+                <a:ea typeface="Calibri" pitchFamily="34" charset="-122"/>
+                <a:cs typeface="Calibri" pitchFamily="34" charset="-120"/>
+              </a:rPr>
+              <a:t>DA COMPRENDERE PIÙ AVANTI</a:t>
+            </a:r>
+            <a:endParaRPr lang="en-US" sz="1100" dirty="0"/>
+          </a:p>
+        </p:txBody>
+      </p:sp>
+      <p:sp>
+        <p:nvSpPr>
+          <p:cNvPr id="21" name="Shape 17"/>
+          <p:cNvSpPr/>
+          <p:nvPr/>
+        </p:nvSpPr>
+        <p:spPr>
+          <a:xfrm>
+            <a:off x="6675069" y="91440"/>
+            <a:ext cx="2125980" cy="274320"/>
+          </a:xfrm>
+          <a:prstGeom prst="rect">
+            <a:avLst/>
+          </a:prstGeom>
+          <a:solidFill>
+            <a:srgbClr val="FEF3C7"/>
+          </a:solidFill>
+          <a:ln w="12700">
+            <a:solidFill>
+              <a:srgbClr val="B45309"/>
+            </a:solidFill>
+            <a:prstDash val="solid"/>
+          </a:ln>
+        </p:spPr>
+      </p:sp>
+      <p:sp>
+        <p:nvSpPr>
+          <p:cNvPr id="22" name="Shape 18"/>
+          <p:cNvSpPr/>
+          <p:nvPr/>
+        </p:nvSpPr>
+        <p:spPr>
+          <a:xfrm>
+            <a:off x="6675069" y="91440"/>
+            <a:ext cx="27432" cy="274320"/>
+          </a:xfrm>
+          <a:prstGeom prst="rect">
+            <a:avLst/>
+          </a:prstGeom>
+          <a:solidFill>
+            <a:srgbClr val="B45309"/>
+          </a:solidFill>
+          <a:ln w="12700">
+            <a:solidFill>
+              <a:srgbClr val="B45309"/>
+            </a:solidFill>
+            <a:prstDash val="solid"/>
+          </a:ln>
+        </p:spPr>
+      </p:sp>
+      <p:sp>
+        <p:nvSpPr>
+          <p:cNvPr id="23" name="Shape 19"/>
+          <p:cNvSpPr/>
+          <p:nvPr/>
+        </p:nvSpPr>
+        <p:spPr>
+          <a:xfrm>
+            <a:off x="6729933" y="91440"/>
+            <a:ext cx="27432" cy="274320"/>
+          </a:xfrm>
+          <a:prstGeom prst="rect">
+            <a:avLst/>
+          </a:prstGeom>
+          <a:solidFill>
+            <a:srgbClr val="B45309"/>
+          </a:solidFill>
+          <a:ln w="12700">
+            <a:solidFill>
+              <a:srgbClr val="B45309"/>
+            </a:solidFill>
+            <a:prstDash val="solid"/>
+          </a:ln>
+        </p:spPr>
+      </p:sp>
+      <p:pic>
+        <p:nvPicPr>
+          <p:cNvPr id="24" name="Image 2" descr="preencoded.png">    </p:cNvPr>
+          <p:cNvPicPr>
+            <a:picLocks noChangeAspect="1"/>
+          </p:cNvPicPr>
+          <p:nvPr/>
+        </p:nvPicPr>
+        <p:blipFill>
+          <a:blip r:embed="rId3"/>
+          <a:stretch>
+            <a:fillRect/>
+          </a:stretch>
+        </p:blipFill>
+        <p:spPr>
+          <a:xfrm>
+            <a:off x="6803085" y="128016"/>
+            <a:ext cx="201168" cy="201168"/>
+          </a:xfrm>
+          <a:prstGeom prst="rect">
+            <a:avLst/>
+          </a:prstGeom>
+        </p:spPr>
+      </p:pic>
+      <p:sp>
+        <p:nvSpPr>
+          <p:cNvPr id="25" name="Text 20"/>
+          <p:cNvSpPr txBox="1"/>
+          <p:nvPr/>
+        </p:nvSpPr>
+        <p:spPr>
+          <a:xfrm>
+            <a:off x="7059117" y="91440"/>
+            <a:ext cx="1705356" cy="274320"/>
+          </a:xfrm>
+          <a:prstGeom prst="rect">
+            <a:avLst/>
+          </a:prstGeom>
+          <a:noFill/>
+          <a:ln/>
+        </p:spPr>
+        <p:txBody>
+          <a:bodyPr wrap="square" lIns="0" tIns="0" rIns="0" bIns="0" rtlCol="0" anchor="ctr"/>
+          <a:lstStyle/>
+          <a:p>
+            <a:pPr indent="0" marL="0">
+              <a:buNone/>
+            </a:pPr>
+            <a:r>
+              <a:rPr lang="en-US" sz="1100" b="1" dirty="0">
+                <a:solidFill>
+                  <a:srgbClr val="92400E"/>
+                </a:solidFill>
+                <a:latin typeface="Calibri" pitchFamily="34" charset="0"/>
+                <a:ea typeface="Calibri" pitchFamily="34" charset="-122"/>
+                <a:cs typeface="Calibri" pitchFamily="34" charset="-120"/>
+              </a:rPr>
+              <a:t>DA UTILIZZARE OGGI</a:t>
+            </a:r>
+            <a:endParaRPr lang="en-US" sz="1100" dirty="0"/>
+          </a:p>
+        </p:txBody>
+      </p:sp>
+      <p:sp>
+        <p:nvSpPr>
+          <p:cNvPr id="26" name="Shape 21"/>
+          <p:cNvSpPr/>
+          <p:nvPr/>
+        </p:nvSpPr>
+        <p:spPr>
+          <a:xfrm>
+            <a:off x="4352747" y="91440"/>
+            <a:ext cx="2212594" cy="274320"/>
+          </a:xfrm>
+          <a:prstGeom prst="rect">
+            <a:avLst/>
+          </a:prstGeom>
+          <a:solidFill>
+            <a:srgbClr val="E0F2FE"/>
+          </a:solidFill>
+          <a:ln w="12700">
+            <a:solidFill>
+              <a:srgbClr val="0369A1"/>
+            </a:solidFill>
+            <a:prstDash val="solid"/>
+          </a:ln>
+        </p:spPr>
+      </p:sp>
+      <p:sp>
+        <p:nvSpPr>
+          <p:cNvPr id="27" name="Shape 22"/>
+          <p:cNvSpPr/>
+          <p:nvPr/>
+        </p:nvSpPr>
+        <p:spPr>
+          <a:xfrm>
+            <a:off x="4352747" y="91440"/>
+            <a:ext cx="73152" cy="274320"/>
+          </a:xfrm>
+          <a:prstGeom prst="rect">
+            <a:avLst/>
+          </a:prstGeom>
+          <a:solidFill>
+            <a:srgbClr val="0369A1"/>
+          </a:solidFill>
+          <a:ln w="12700">
+            <a:solidFill>
+              <a:srgbClr val="0369A1"/>
+            </a:solidFill>
+            <a:prstDash val="solid"/>
+          </a:ln>
+        </p:spPr>
+      </p:sp>
+      <p:pic>
+        <p:nvPicPr>
+          <p:cNvPr id="28" name="Image 3" descr="preencoded.png">    </p:cNvPr>
+          <p:cNvPicPr>
+            <a:picLocks noChangeAspect="1"/>
+          </p:cNvPicPr>
+          <p:nvPr/>
+        </p:nvPicPr>
+        <p:blipFill>
+          <a:blip r:embed="rId4"/>
+          <a:stretch>
+            <a:fillRect/>
+          </a:stretch>
+        </p:blipFill>
+        <p:spPr>
+          <a:xfrm>
+            <a:off x="4480763" y="128016"/>
+            <a:ext cx="201168" cy="201168"/>
+          </a:xfrm>
+          <a:prstGeom prst="rect">
+            <a:avLst/>
+          </a:prstGeom>
+        </p:spPr>
+      </p:pic>
+      <p:sp>
+        <p:nvSpPr>
+          <p:cNvPr id="29" name="Text 23"/>
+          <p:cNvSpPr txBox="1"/>
+          <p:nvPr/>
+        </p:nvSpPr>
+        <p:spPr>
+          <a:xfrm>
+            <a:off x="4736795" y="91440"/>
+            <a:ext cx="1791970" cy="274320"/>
+          </a:xfrm>
+          <a:prstGeom prst="rect">
+            <a:avLst/>
+          </a:prstGeom>
+          <a:noFill/>
+          <a:ln/>
+        </p:spPr>
+        <p:txBody>
+          <a:bodyPr wrap="square" lIns="0" tIns="0" rIns="0" bIns="0" rtlCol="0" anchor="ctr"/>
+          <a:lstStyle/>
+          <a:p>
+            <a:pPr indent="0" marL="0">
+              <a:buNone/>
+            </a:pPr>
+            <a:r>
+              <a:rPr lang="en-US" sz="1100" b="1" dirty="0">
+                <a:solidFill>
+                  <a:srgbClr val="075985"/>
+                </a:solidFill>
+                <a:latin typeface="Calibri" pitchFamily="34" charset="0"/>
+                <a:ea typeface="Calibri" pitchFamily="34" charset="-122"/>
+                <a:cs typeface="Calibri" pitchFamily="34" charset="-120"/>
+              </a:rPr>
+              <a:t>DA COMPRENDERE OGGI</a:t>
+            </a:r>
+            <a:endParaRPr lang="en-US" sz="1100" dirty="0"/>
+          </a:p>
+        </p:txBody>
+      </p:sp>
+      <p:sp>
+        <p:nvSpPr>
           <p:cNvPr id="25" name="Slide Number Placeholder 0"/>
           <p:cNvSpPr>
             <a:spLocks noGrp="1"/>
@@ -4383,6 +4814,133 @@
       </p:sp>
       <p:sp>
         <p:nvSpPr>
+          <p:cNvPr id="28" name="Shape 26"/>
+          <p:cNvSpPr/>
+          <p:nvPr/>
+        </p:nvSpPr>
+        <p:spPr>
+          <a:xfrm>
+            <a:off x="7985963" y="91440"/>
+            <a:ext cx="3657092" cy="274320"/>
+          </a:xfrm>
+          <a:prstGeom prst="rect">
+            <a:avLst/>
+          </a:prstGeom>
+          <a:solidFill>
+            <a:srgbClr val="E0F2FE"/>
+          </a:solidFill>
+          <a:ln w="12700">
+            <a:solidFill>
+              <a:srgbClr val="0369A1"/>
+            </a:solidFill>
+            <a:prstDash val="solid"/>
+          </a:ln>
+        </p:spPr>
+      </p:sp>
+      <p:sp>
+        <p:nvSpPr>
+          <p:cNvPr id="29" name="Shape 27"/>
+          <p:cNvSpPr/>
+          <p:nvPr/>
+        </p:nvSpPr>
+        <p:spPr>
+          <a:xfrm>
+            <a:off x="7985963" y="91440"/>
+            <a:ext cx="73152" cy="274320"/>
+          </a:xfrm>
+          <a:prstGeom prst="rect">
+            <a:avLst/>
+          </a:prstGeom>
+          <a:solidFill>
+            <a:srgbClr val="0369A1"/>
+          </a:solidFill>
+          <a:ln w="12700">
+            <a:solidFill>
+              <a:srgbClr val="0369A1"/>
+            </a:solidFill>
+            <a:prstDash val="solid"/>
+          </a:ln>
+        </p:spPr>
+      </p:sp>
+      <p:pic>
+        <p:nvPicPr>
+          <p:cNvPr id="30" name="Image 0" descr="preencoded.png">    </p:cNvPr>
+          <p:cNvPicPr>
+            <a:picLocks noChangeAspect="1"/>
+          </p:cNvPicPr>
+          <p:nvPr/>
+        </p:nvPicPr>
+        <p:blipFill>
+          <a:blip r:embed="rId1"/>
+          <a:stretch>
+            <a:fillRect/>
+          </a:stretch>
+        </p:blipFill>
+        <p:spPr>
+          <a:xfrm>
+            <a:off x="8113979" y="128016"/>
+            <a:ext cx="201168" cy="201168"/>
+          </a:xfrm>
+          <a:prstGeom prst="rect">
+            <a:avLst/>
+          </a:prstGeom>
+        </p:spPr>
+      </p:pic>
+      <p:sp>
+        <p:nvSpPr>
+          <p:cNvPr id="31" name="Text 28"/>
+          <p:cNvSpPr txBox="1"/>
+          <p:nvPr/>
+        </p:nvSpPr>
+        <p:spPr>
+          <a:xfrm>
+            <a:off x="8370011" y="91440"/>
+            <a:ext cx="3236468" cy="274320"/>
+          </a:xfrm>
+          <a:prstGeom prst="rect">
+            <a:avLst/>
+          </a:prstGeom>
+          <a:noFill/>
+          <a:ln/>
+        </p:spPr>
+        <p:txBody>
+          <a:bodyPr wrap="square" lIns="0" tIns="0" rIns="0" bIns="0" rtlCol="0" anchor="ctr"/>
+          <a:lstStyle/>
+          <a:p>
+            <a:pPr indent="0" marL="0">
+              <a:buNone/>
+            </a:pPr>
+            <a:r>
+              <a:rPr lang="en-US" sz="1100" b="1" dirty="0">
+                <a:solidFill>
+                  <a:srgbClr val="075985"/>
+                </a:solidFill>
+                <a:latin typeface="Calibri" pitchFamily="34" charset="0"/>
+                <a:ea typeface="Calibri" pitchFamily="34" charset="-122"/>
+                <a:cs typeface="Calibri" pitchFamily="34" charset="-120"/>
+              </a:rPr>
+              <a:t>DA COMPRENDERE OGGI</a:t>
+            </a:r>
+            <a:pPr indent="0" marL="0">
+              <a:buNone/>
+            </a:pPr>
+            <a:r>
+              <a:rPr lang="en-US" sz="1100" dirty="0">
+                <a:solidFill>
+                  <a:srgbClr val="075985"/>
+                </a:solidFill>
+                <a:latin typeface="Calibri" pitchFamily="34" charset="0"/>
+                <a:ea typeface="Calibri" pitchFamily="34" charset="-122"/>
+                <a:cs typeface="Calibri" pitchFamily="34" charset="-120"/>
+              </a:rPr>
+              <a:t> · interruzioni e trap</a:t>
+            </a:r>
+            <a:endParaRPr lang="en-US" sz="1100" dirty="0"/>
+          </a:p>
+        </p:txBody>
+      </p:sp>
+      <p:sp>
+        <p:nvSpPr>
           <p:cNvPr id="25" name="Slide Number Placeholder 0"/>
           <p:cNvSpPr>
             <a:spLocks noGrp="1"/>
@@ -5409,6 +5967,133 @@
       </p:sp>
       <p:sp>
         <p:nvSpPr>
+          <p:cNvPr id="27" name="Shape 25"/>
+          <p:cNvSpPr/>
+          <p:nvPr/>
+        </p:nvSpPr>
+        <p:spPr>
+          <a:xfrm>
+            <a:off x="7985963" y="91440"/>
+            <a:ext cx="3657092" cy="274320"/>
+          </a:xfrm>
+          <a:prstGeom prst="rect">
+            <a:avLst/>
+          </a:prstGeom>
+          <a:solidFill>
+            <a:srgbClr val="E0F2FE"/>
+          </a:solidFill>
+          <a:ln w="12700">
+            <a:solidFill>
+              <a:srgbClr val="0369A1"/>
+            </a:solidFill>
+            <a:prstDash val="solid"/>
+          </a:ln>
+        </p:spPr>
+      </p:sp>
+      <p:sp>
+        <p:nvSpPr>
+          <p:cNvPr id="28" name="Shape 26"/>
+          <p:cNvSpPr/>
+          <p:nvPr/>
+        </p:nvSpPr>
+        <p:spPr>
+          <a:xfrm>
+            <a:off x="7985963" y="91440"/>
+            <a:ext cx="73152" cy="274320"/>
+          </a:xfrm>
+          <a:prstGeom prst="rect">
+            <a:avLst/>
+          </a:prstGeom>
+          <a:solidFill>
+            <a:srgbClr val="0369A1"/>
+          </a:solidFill>
+          <a:ln w="12700">
+            <a:solidFill>
+              <a:srgbClr val="0369A1"/>
+            </a:solidFill>
+            <a:prstDash val="solid"/>
+          </a:ln>
+        </p:spPr>
+      </p:sp>
+      <p:pic>
+        <p:nvPicPr>
+          <p:cNvPr id="29" name="Image 0" descr="preencoded.png">    </p:cNvPr>
+          <p:cNvPicPr>
+            <a:picLocks noChangeAspect="1"/>
+          </p:cNvPicPr>
+          <p:nvPr/>
+        </p:nvPicPr>
+        <p:blipFill>
+          <a:blip r:embed="rId1"/>
+          <a:stretch>
+            <a:fillRect/>
+          </a:stretch>
+        </p:blipFill>
+        <p:spPr>
+          <a:xfrm>
+            <a:off x="8113979" y="128016"/>
+            <a:ext cx="201168" cy="201168"/>
+          </a:xfrm>
+          <a:prstGeom prst="rect">
+            <a:avLst/>
+          </a:prstGeom>
+        </p:spPr>
+      </p:pic>
+      <p:sp>
+        <p:nvSpPr>
+          <p:cNvPr id="30" name="Text 27"/>
+          <p:cNvSpPr txBox="1"/>
+          <p:nvPr/>
+        </p:nvSpPr>
+        <p:spPr>
+          <a:xfrm>
+            <a:off x="8370011" y="91440"/>
+            <a:ext cx="3236468" cy="274320"/>
+          </a:xfrm>
+          <a:prstGeom prst="rect">
+            <a:avLst/>
+          </a:prstGeom>
+          <a:noFill/>
+          <a:ln/>
+        </p:spPr>
+        <p:txBody>
+          <a:bodyPr wrap="square" lIns="0" tIns="0" rIns="0" bIns="0" rtlCol="0" anchor="ctr"/>
+          <a:lstStyle/>
+          <a:p>
+            <a:pPr indent="0" marL="0">
+              <a:buNone/>
+            </a:pPr>
+            <a:r>
+              <a:rPr lang="en-US" sz="1100" b="1" dirty="0">
+                <a:solidFill>
+                  <a:srgbClr val="075985"/>
+                </a:solidFill>
+                <a:latin typeface="Calibri" pitchFamily="34" charset="0"/>
+                <a:ea typeface="Calibri" pitchFamily="34" charset="-122"/>
+                <a:cs typeface="Calibri" pitchFamily="34" charset="-120"/>
+              </a:rPr>
+              <a:t>DA COMPRENDERE OGGI</a:t>
+            </a:r>
+            <a:pPr indent="0" marL="0">
+              <a:buNone/>
+            </a:pPr>
+            <a:r>
+              <a:rPr lang="en-US" sz="1100" dirty="0">
+                <a:solidFill>
+                  <a:srgbClr val="075985"/>
+                </a:solidFill>
+                <a:latin typeface="Calibri" pitchFamily="34" charset="0"/>
+                <a:ea typeface="Calibri" pitchFamily="34" charset="-122"/>
+                <a:cs typeface="Calibri" pitchFamily="34" charset="-120"/>
+              </a:rPr>
+              <a:t> · interruzioni e trap</a:t>
+            </a:r>
+            <a:endParaRPr lang="en-US" sz="1100" dirty="0"/>
+          </a:p>
+        </p:txBody>
+      </p:sp>
+      <p:sp>
+        <p:nvSpPr>
           <p:cNvPr id="25" name="Slide Number Placeholder 0"/>
           <p:cNvSpPr>
             <a:spLocks noGrp="1"/>
@@ -6052,6 +6737,133 @@
               <a:t>Se l'interruzione lo consente: ripristinare il contesto, e riprendere il programma sospeso dall'istruzione che segue l'ultima eseguita</a:t>
             </a:r>
             <a:endParaRPr lang="en-US" sz="2200" dirty="0"/>
+          </a:p>
+        </p:txBody>
+      </p:sp>
+      <p:sp>
+        <p:nvSpPr>
+          <p:cNvPr id="15" name="Shape 13"/>
+          <p:cNvSpPr/>
+          <p:nvPr/>
+        </p:nvSpPr>
+        <p:spPr>
+          <a:xfrm>
+            <a:off x="7985963" y="91440"/>
+            <a:ext cx="3657092" cy="274320"/>
+          </a:xfrm>
+          <a:prstGeom prst="rect">
+            <a:avLst/>
+          </a:prstGeom>
+          <a:solidFill>
+            <a:srgbClr val="E0F2FE"/>
+          </a:solidFill>
+          <a:ln w="12700">
+            <a:solidFill>
+              <a:srgbClr val="0369A1"/>
+            </a:solidFill>
+            <a:prstDash val="solid"/>
+          </a:ln>
+        </p:spPr>
+      </p:sp>
+      <p:sp>
+        <p:nvSpPr>
+          <p:cNvPr id="16" name="Shape 14"/>
+          <p:cNvSpPr/>
+          <p:nvPr/>
+        </p:nvSpPr>
+        <p:spPr>
+          <a:xfrm>
+            <a:off x="7985963" y="91440"/>
+            <a:ext cx="73152" cy="274320"/>
+          </a:xfrm>
+          <a:prstGeom prst="rect">
+            <a:avLst/>
+          </a:prstGeom>
+          <a:solidFill>
+            <a:srgbClr val="0369A1"/>
+          </a:solidFill>
+          <a:ln w="12700">
+            <a:solidFill>
+              <a:srgbClr val="0369A1"/>
+            </a:solidFill>
+            <a:prstDash val="solid"/>
+          </a:ln>
+        </p:spPr>
+      </p:sp>
+      <p:pic>
+        <p:nvPicPr>
+          <p:cNvPr id="17" name="Image 0" descr="preencoded.png">    </p:cNvPr>
+          <p:cNvPicPr>
+            <a:picLocks noChangeAspect="1"/>
+          </p:cNvPicPr>
+          <p:nvPr/>
+        </p:nvPicPr>
+        <p:blipFill>
+          <a:blip r:embed="rId1"/>
+          <a:stretch>
+            <a:fillRect/>
+          </a:stretch>
+        </p:blipFill>
+        <p:spPr>
+          <a:xfrm>
+            <a:off x="8113979" y="128016"/>
+            <a:ext cx="201168" cy="201168"/>
+          </a:xfrm>
+          <a:prstGeom prst="rect">
+            <a:avLst/>
+          </a:prstGeom>
+        </p:spPr>
+      </p:pic>
+      <p:sp>
+        <p:nvSpPr>
+          <p:cNvPr id="18" name="Text 15"/>
+          <p:cNvSpPr txBox="1"/>
+          <p:nvPr/>
+        </p:nvSpPr>
+        <p:spPr>
+          <a:xfrm>
+            <a:off x="8370011" y="91440"/>
+            <a:ext cx="3236468" cy="274320"/>
+          </a:xfrm>
+          <a:prstGeom prst="rect">
+            <a:avLst/>
+          </a:prstGeom>
+          <a:noFill/>
+          <a:ln/>
+        </p:spPr>
+        <p:txBody>
+          <a:bodyPr wrap="square" lIns="0" tIns="0" rIns="0" bIns="0" rtlCol="0" anchor="ctr"/>
+          <a:lstStyle/>
+          <a:p>
+            <a:pPr indent="0" marL="0">
+              <a:buNone/>
+            </a:pPr>
+            <a:r>
+              <a:rPr lang="en-US" sz="1100" b="1" dirty="0">
+                <a:solidFill>
+                  <a:srgbClr val="075985"/>
+                </a:solidFill>
+                <a:latin typeface="Calibri" pitchFamily="34" charset="0"/>
+                <a:ea typeface="Calibri" pitchFamily="34" charset="-122"/>
+                <a:cs typeface="Calibri" pitchFamily="34" charset="-120"/>
+              </a:rPr>
+              <a:t>DA COMPRENDERE OGGI</a:t>
+            </a:r>
+            <a:pPr indent="0" marL="0">
+              <a:buNone/>
+            </a:pPr>
+            <a:r>
+              <a:rPr lang="en-US" sz="1100" dirty="0">
+                <a:solidFill>
+                  <a:srgbClr val="075985"/>
+                </a:solidFill>
+                <a:latin typeface="Calibri" pitchFamily="34" charset="0"/>
+                <a:ea typeface="Calibri" pitchFamily="34" charset="-122"/>
+                <a:cs typeface="Calibri" pitchFamily="34" charset="-120"/>
+              </a:rPr>
+              <a:t> · interruzioni e trap</a:t>
+            </a:r>
+            <a:endParaRPr lang="en-US" sz="1100" dirty="0"/>
           </a:p>
         </p:txBody>
       </p:sp>
@@ -7644,6 +8456,133 @@
       </p:graphicFrame>
       <p:sp>
         <p:nvSpPr>
+          <p:cNvPr id="4" name="Shape 1"/>
+          <p:cNvSpPr/>
+          <p:nvPr/>
+        </p:nvSpPr>
+        <p:spPr>
+          <a:xfrm>
+            <a:off x="7985963" y="91440"/>
+            <a:ext cx="3657092" cy="274320"/>
+          </a:xfrm>
+          <a:prstGeom prst="rect">
+            <a:avLst/>
+          </a:prstGeom>
+          <a:solidFill>
+            <a:srgbClr val="E0F2FE"/>
+          </a:solidFill>
+          <a:ln w="12700">
+            <a:solidFill>
+              <a:srgbClr val="0369A1"/>
+            </a:solidFill>
+            <a:prstDash val="solid"/>
+          </a:ln>
+        </p:spPr>
+      </p:sp>
+      <p:sp>
+        <p:nvSpPr>
+          <p:cNvPr id="5" name="Shape 2"/>
+          <p:cNvSpPr/>
+          <p:nvPr/>
+        </p:nvSpPr>
+        <p:spPr>
+          <a:xfrm>
+            <a:off x="7985963" y="91440"/>
+            <a:ext cx="73152" cy="274320"/>
+          </a:xfrm>
+          <a:prstGeom prst="rect">
+            <a:avLst/>
+          </a:prstGeom>
+          <a:solidFill>
+            <a:srgbClr val="0369A1"/>
+          </a:solidFill>
+          <a:ln w="12700">
+            <a:solidFill>
+              <a:srgbClr val="0369A1"/>
+            </a:solidFill>
+            <a:prstDash val="solid"/>
+          </a:ln>
+        </p:spPr>
+      </p:sp>
+      <p:pic>
+        <p:nvPicPr>
+          <p:cNvPr id="6" name="Image 0" descr="preencoded.png">    </p:cNvPr>
+          <p:cNvPicPr>
+            <a:picLocks noChangeAspect="1"/>
+          </p:cNvPicPr>
+          <p:nvPr/>
+        </p:nvPicPr>
+        <p:blipFill>
+          <a:blip r:embed="rId1"/>
+          <a:stretch>
+            <a:fillRect/>
+          </a:stretch>
+        </p:blipFill>
+        <p:spPr>
+          <a:xfrm>
+            <a:off x="8113979" y="128016"/>
+            <a:ext cx="201168" cy="201168"/>
+          </a:xfrm>
+          <a:prstGeom prst="rect">
+            <a:avLst/>
+          </a:prstGeom>
+        </p:spPr>
+      </p:pic>
+      <p:sp>
+        <p:nvSpPr>
+          <p:cNvPr id="7" name="Text 3"/>
+          <p:cNvSpPr txBox="1"/>
+          <p:nvPr/>
+        </p:nvSpPr>
+        <p:spPr>
+          <a:xfrm>
+            <a:off x="8370011" y="91440"/>
+            <a:ext cx="3236468" cy="274320"/>
+          </a:xfrm>
+          <a:prstGeom prst="rect">
+            <a:avLst/>
+          </a:prstGeom>
+          <a:noFill/>
+          <a:ln/>
+        </p:spPr>
+        <p:txBody>
+          <a:bodyPr wrap="square" lIns="0" tIns="0" rIns="0" bIns="0" rtlCol="0" anchor="ctr"/>
+          <a:lstStyle/>
+          <a:p>
+            <a:pPr indent="0" marL="0">
+              <a:buNone/>
+            </a:pPr>
+            <a:r>
+              <a:rPr lang="en-US" sz="1100" b="1" dirty="0">
+                <a:solidFill>
+                  <a:srgbClr val="075985"/>
+                </a:solidFill>
+                <a:latin typeface="Calibri" pitchFamily="34" charset="0"/>
+                <a:ea typeface="Calibri" pitchFamily="34" charset="-122"/>
+                <a:cs typeface="Calibri" pitchFamily="34" charset="-120"/>
+              </a:rPr>
+              <a:t>DA COMPRENDERE OGGI</a:t>
+            </a:r>
+            <a:pPr indent="0" marL="0">
+              <a:buNone/>
+            </a:pPr>
+            <a:r>
+              <a:rPr lang="en-US" sz="1100" dirty="0">
+                <a:solidFill>
+                  <a:srgbClr val="075985"/>
+                </a:solidFill>
+                <a:latin typeface="Calibri" pitchFamily="34" charset="0"/>
+                <a:ea typeface="Calibri" pitchFamily="34" charset="-122"/>
+                <a:cs typeface="Calibri" pitchFamily="34" charset="-120"/>
+              </a:rPr>
+              <a:t> · interruzioni e trap</a:t>
+            </a:r>
+            <a:endParaRPr lang="en-US" sz="1100" dirty="0"/>
+          </a:p>
+        </p:txBody>
+      </p:sp>
+      <p:sp>
+        <p:nvSpPr>
           <p:cNvPr id="25" name="Slide Number Placeholder 0"/>
           <p:cNvSpPr>
             <a:spLocks noGrp="1"/>
@@ -8287,6 +9226,133 @@
               <a:t>mret, alla fine del gestore, annulla tutto: MIE := MPIE e PC := mepc</a:t>
             </a:r>
             <a:endParaRPr lang="en-US" sz="2200" dirty="0"/>
+          </a:p>
+        </p:txBody>
+      </p:sp>
+      <p:sp>
+        <p:nvSpPr>
+          <p:cNvPr id="15" name="Shape 13"/>
+          <p:cNvSpPr/>
+          <p:nvPr/>
+        </p:nvSpPr>
+        <p:spPr>
+          <a:xfrm>
+            <a:off x="7985963" y="91440"/>
+            <a:ext cx="3657092" cy="274320"/>
+          </a:xfrm>
+          <a:prstGeom prst="rect">
+            <a:avLst/>
+          </a:prstGeom>
+          <a:solidFill>
+            <a:srgbClr val="E0F2FE"/>
+          </a:solidFill>
+          <a:ln w="12700">
+            <a:solidFill>
+              <a:srgbClr val="0369A1"/>
+            </a:solidFill>
+            <a:prstDash val="solid"/>
+          </a:ln>
+        </p:spPr>
+      </p:sp>
+      <p:sp>
+        <p:nvSpPr>
+          <p:cNvPr id="16" name="Shape 14"/>
+          <p:cNvSpPr/>
+          <p:nvPr/>
+        </p:nvSpPr>
+        <p:spPr>
+          <a:xfrm>
+            <a:off x="7985963" y="91440"/>
+            <a:ext cx="73152" cy="274320"/>
+          </a:xfrm>
+          <a:prstGeom prst="rect">
+            <a:avLst/>
+          </a:prstGeom>
+          <a:solidFill>
+            <a:srgbClr val="0369A1"/>
+          </a:solidFill>
+          <a:ln w="12700">
+            <a:solidFill>
+              <a:srgbClr val="0369A1"/>
+            </a:solidFill>
+            <a:prstDash val="solid"/>
+          </a:ln>
+        </p:spPr>
+      </p:sp>
+      <p:pic>
+        <p:nvPicPr>
+          <p:cNvPr id="17" name="Image 0" descr="preencoded.png">    </p:cNvPr>
+          <p:cNvPicPr>
+            <a:picLocks noChangeAspect="1"/>
+          </p:cNvPicPr>
+          <p:nvPr/>
+        </p:nvPicPr>
+        <p:blipFill>
+          <a:blip r:embed="rId1"/>
+          <a:stretch>
+            <a:fillRect/>
+          </a:stretch>
+        </p:blipFill>
+        <p:spPr>
+          <a:xfrm>
+            <a:off x="8113979" y="128016"/>
+            <a:ext cx="201168" cy="201168"/>
+          </a:xfrm>
+          <a:prstGeom prst="rect">
+            <a:avLst/>
+          </a:prstGeom>
+        </p:spPr>
+      </p:pic>
+      <p:sp>
+        <p:nvSpPr>
+          <p:cNvPr id="18" name="Text 15"/>
+          <p:cNvSpPr txBox="1"/>
+          <p:nvPr/>
+        </p:nvSpPr>
+        <p:spPr>
+          <a:xfrm>
+            <a:off x="8370011" y="91440"/>
+            <a:ext cx="3236468" cy="274320"/>
+          </a:xfrm>
+          <a:prstGeom prst="rect">
+            <a:avLst/>
+          </a:prstGeom>
+          <a:noFill/>
+          <a:ln/>
+        </p:spPr>
+        <p:txBody>
+          <a:bodyPr wrap="square" lIns="0" tIns="0" rIns="0" bIns="0" rtlCol="0" anchor="ctr"/>
+          <a:lstStyle/>
+          <a:p>
+            <a:pPr indent="0" marL="0">
+              <a:buNone/>
+            </a:pPr>
+            <a:r>
+              <a:rPr lang="en-US" sz="1100" b="1" dirty="0">
+                <a:solidFill>
+                  <a:srgbClr val="075985"/>
+                </a:solidFill>
+                <a:latin typeface="Calibri" pitchFamily="34" charset="0"/>
+                <a:ea typeface="Calibri" pitchFamily="34" charset="-122"/>
+                <a:cs typeface="Calibri" pitchFamily="34" charset="-120"/>
+              </a:rPr>
+              <a:t>DA COMPRENDERE OGGI</a:t>
+            </a:r>
+            <a:pPr indent="0" marL="0">
+              <a:buNone/>
+            </a:pPr>
+            <a:r>
+              <a:rPr lang="en-US" sz="1100" dirty="0">
+                <a:solidFill>
+                  <a:srgbClr val="075985"/>
+                </a:solidFill>
+                <a:latin typeface="Calibri" pitchFamily="34" charset="0"/>
+                <a:ea typeface="Calibri" pitchFamily="34" charset="-122"/>
+                <a:cs typeface="Calibri" pitchFamily="34" charset="-120"/>
+              </a:rPr>
+              <a:t> · interruzioni e trap</a:t>
+            </a:r>
+            <a:endParaRPr lang="en-US" sz="1100" dirty="0"/>
           </a:p>
         </p:txBody>
       </p:sp>
@@ -10085,6 +11151,133 @@
       </p:graphicFrame>
       <p:sp>
         <p:nvSpPr>
+          <p:cNvPr id="4" name="Shape 1"/>
+          <p:cNvSpPr/>
+          <p:nvPr/>
+        </p:nvSpPr>
+        <p:spPr>
+          <a:xfrm>
+            <a:off x="7985963" y="91440"/>
+            <a:ext cx="3657092" cy="274320"/>
+          </a:xfrm>
+          <a:prstGeom prst="rect">
+            <a:avLst/>
+          </a:prstGeom>
+          <a:solidFill>
+            <a:srgbClr val="E0F2FE"/>
+          </a:solidFill>
+          <a:ln w="12700">
+            <a:solidFill>
+              <a:srgbClr val="0369A1"/>
+            </a:solidFill>
+            <a:prstDash val="solid"/>
+          </a:ln>
+        </p:spPr>
+      </p:sp>
+      <p:sp>
+        <p:nvSpPr>
+          <p:cNvPr id="5" name="Shape 2"/>
+          <p:cNvSpPr/>
+          <p:nvPr/>
+        </p:nvSpPr>
+        <p:spPr>
+          <a:xfrm>
+            <a:off x="7985963" y="91440"/>
+            <a:ext cx="73152" cy="274320"/>
+          </a:xfrm>
+          <a:prstGeom prst="rect">
+            <a:avLst/>
+          </a:prstGeom>
+          <a:solidFill>
+            <a:srgbClr val="0369A1"/>
+          </a:solidFill>
+          <a:ln w="12700">
+            <a:solidFill>
+              <a:srgbClr val="0369A1"/>
+            </a:solidFill>
+            <a:prstDash val="solid"/>
+          </a:ln>
+        </p:spPr>
+      </p:sp>
+      <p:pic>
+        <p:nvPicPr>
+          <p:cNvPr id="6" name="Image 0" descr="preencoded.png">    </p:cNvPr>
+          <p:cNvPicPr>
+            <a:picLocks noChangeAspect="1"/>
+          </p:cNvPicPr>
+          <p:nvPr/>
+        </p:nvPicPr>
+        <p:blipFill>
+          <a:blip r:embed="rId1"/>
+          <a:stretch>
+            <a:fillRect/>
+          </a:stretch>
+        </p:blipFill>
+        <p:spPr>
+          <a:xfrm>
+            <a:off x="8113979" y="128016"/>
+            <a:ext cx="201168" cy="201168"/>
+          </a:xfrm>
+          <a:prstGeom prst="rect">
+            <a:avLst/>
+          </a:prstGeom>
+        </p:spPr>
+      </p:pic>
+      <p:sp>
+        <p:nvSpPr>
+          <p:cNvPr id="7" name="Text 3"/>
+          <p:cNvSpPr txBox="1"/>
+          <p:nvPr/>
+        </p:nvSpPr>
+        <p:spPr>
+          <a:xfrm>
+            <a:off x="8370011" y="91440"/>
+            <a:ext cx="3236468" cy="274320"/>
+          </a:xfrm>
+          <a:prstGeom prst="rect">
+            <a:avLst/>
+          </a:prstGeom>
+          <a:noFill/>
+          <a:ln/>
+        </p:spPr>
+        <p:txBody>
+          <a:bodyPr wrap="square" lIns="0" tIns="0" rIns="0" bIns="0" rtlCol="0" anchor="ctr"/>
+          <a:lstStyle/>
+          <a:p>
+            <a:pPr indent="0" marL="0">
+              <a:buNone/>
+            </a:pPr>
+            <a:r>
+              <a:rPr lang="en-US" sz="1100" b="1" dirty="0">
+                <a:solidFill>
+                  <a:srgbClr val="075985"/>
+                </a:solidFill>
+                <a:latin typeface="Calibri" pitchFamily="34" charset="0"/>
+                <a:ea typeface="Calibri" pitchFamily="34" charset="-122"/>
+                <a:cs typeface="Calibri" pitchFamily="34" charset="-120"/>
+              </a:rPr>
+              <a:t>DA COMPRENDERE OGGI</a:t>
+            </a:r>
+            <a:pPr indent="0" marL="0">
+              <a:buNone/>
+            </a:pPr>
+            <a:r>
+              <a:rPr lang="en-US" sz="1100" dirty="0">
+                <a:solidFill>
+                  <a:srgbClr val="075985"/>
+                </a:solidFill>
+                <a:latin typeface="Calibri" pitchFamily="34" charset="0"/>
+                <a:ea typeface="Calibri" pitchFamily="34" charset="-122"/>
+                <a:cs typeface="Calibri" pitchFamily="34" charset="-120"/>
+              </a:rPr>
+              <a:t> · interruzioni e trap</a:t>
+            </a:r>
+            <a:endParaRPr lang="en-US" sz="1100" dirty="0"/>
+          </a:p>
+        </p:txBody>
+      </p:sp>
+      <p:sp>
+        <p:nvSpPr>
           <p:cNvPr id="25" name="Slide Number Placeholder 0"/>
           <p:cNvSpPr>
             <a:spLocks noGrp="1"/>
@@ -10592,6 +11785,133 @@
               <a:t>Il menu del firmware PRG32</a:t>
             </a:r>
             <a:endParaRPr lang="en-US" sz="1200" dirty="0"/>
+          </a:p>
+        </p:txBody>
+      </p:sp>
+      <p:sp>
+        <p:nvSpPr>
+          <p:cNvPr id="15" name="Shape 12"/>
+          <p:cNvSpPr/>
+          <p:nvPr/>
+        </p:nvSpPr>
+        <p:spPr>
+          <a:xfrm>
+            <a:off x="7985963" y="91440"/>
+            <a:ext cx="3657092" cy="274320"/>
+          </a:xfrm>
+          <a:prstGeom prst="rect">
+            <a:avLst/>
+          </a:prstGeom>
+          <a:solidFill>
+            <a:srgbClr val="E0F2FE"/>
+          </a:solidFill>
+          <a:ln w="12700">
+            <a:solidFill>
+              <a:srgbClr val="0369A1"/>
+            </a:solidFill>
+            <a:prstDash val="solid"/>
+          </a:ln>
+        </p:spPr>
+      </p:sp>
+      <p:sp>
+        <p:nvSpPr>
+          <p:cNvPr id="16" name="Shape 13"/>
+          <p:cNvSpPr/>
+          <p:nvPr/>
+        </p:nvSpPr>
+        <p:spPr>
+          <a:xfrm>
+            <a:off x="7985963" y="91440"/>
+            <a:ext cx="73152" cy="274320"/>
+          </a:xfrm>
+          <a:prstGeom prst="rect">
+            <a:avLst/>
+          </a:prstGeom>
+          <a:solidFill>
+            <a:srgbClr val="0369A1"/>
+          </a:solidFill>
+          <a:ln w="12700">
+            <a:solidFill>
+              <a:srgbClr val="0369A1"/>
+            </a:solidFill>
+            <a:prstDash val="solid"/>
+          </a:ln>
+        </p:spPr>
+      </p:sp>
+      <p:pic>
+        <p:nvPicPr>
+          <p:cNvPr id="17" name="Image 1" descr="preencoded.png">    </p:cNvPr>
+          <p:cNvPicPr>
+            <a:picLocks noChangeAspect="1"/>
+          </p:cNvPicPr>
+          <p:nvPr/>
+        </p:nvPicPr>
+        <p:blipFill>
+          <a:blip r:embed="rId2"/>
+          <a:stretch>
+            <a:fillRect/>
+          </a:stretch>
+        </p:blipFill>
+        <p:spPr>
+          <a:xfrm>
+            <a:off x="8113979" y="128016"/>
+            <a:ext cx="201168" cy="201168"/>
+          </a:xfrm>
+          <a:prstGeom prst="rect">
+            <a:avLst/>
+          </a:prstGeom>
+        </p:spPr>
+      </p:pic>
+      <p:sp>
+        <p:nvSpPr>
+          <p:cNvPr id="18" name="Text 14"/>
+          <p:cNvSpPr txBox="1"/>
+          <p:nvPr/>
+        </p:nvSpPr>
+        <p:spPr>
+          <a:xfrm>
+            <a:off x="8370011" y="91440"/>
+            <a:ext cx="3236468" cy="274320"/>
+          </a:xfrm>
+          <a:prstGeom prst="rect">
+            <a:avLst/>
+          </a:prstGeom>
+          <a:noFill/>
+          <a:ln/>
+        </p:spPr>
+        <p:txBody>
+          <a:bodyPr wrap="square" lIns="0" tIns="0" rIns="0" bIns="0" rtlCol="0" anchor="ctr"/>
+          <a:lstStyle/>
+          <a:p>
+            <a:pPr indent="0" marL="0">
+              <a:buNone/>
+            </a:pPr>
+            <a:r>
+              <a:rPr lang="en-US" sz="1100" b="1" dirty="0">
+                <a:solidFill>
+                  <a:srgbClr val="075985"/>
+                </a:solidFill>
+                <a:latin typeface="Calibri" pitchFamily="34" charset="0"/>
+                <a:ea typeface="Calibri" pitchFamily="34" charset="-122"/>
+                <a:cs typeface="Calibri" pitchFamily="34" charset="-120"/>
+              </a:rPr>
+              <a:t>DA COMPRENDERE OGGI</a:t>
+            </a:r>
+            <a:pPr indent="0" marL="0">
+              <a:buNone/>
+            </a:pPr>
+            <a:r>
+              <a:rPr lang="en-US" sz="1100" dirty="0">
+                <a:solidFill>
+                  <a:srgbClr val="075985"/>
+                </a:solidFill>
+                <a:latin typeface="Calibri" pitchFamily="34" charset="0"/>
+                <a:ea typeface="Calibri" pitchFamily="34" charset="-122"/>
+                <a:cs typeface="Calibri" pitchFamily="34" charset="-120"/>
+              </a:rPr>
+              <a:t> · interruzioni e trap</a:t>
+            </a:r>
+            <a:endParaRPr lang="en-US" sz="1100" dirty="0"/>
           </a:p>
         </p:txBody>
       </p:sp>
@@ -16787,6 +18107,133 @@
       </p:sp>
       <p:sp>
         <p:nvSpPr>
+          <p:cNvPr id="11" name="Shape 9"/>
+          <p:cNvSpPr/>
+          <p:nvPr/>
+        </p:nvSpPr>
+        <p:spPr>
+          <a:xfrm>
+            <a:off x="7657668" y="91440"/>
+            <a:ext cx="3985387" cy="274320"/>
+          </a:xfrm>
+          <a:prstGeom prst="rect">
+            <a:avLst/>
+          </a:prstGeom>
+          <a:solidFill>
+            <a:srgbClr val="E0F2FE"/>
+          </a:solidFill>
+          <a:ln w="12700">
+            <a:solidFill>
+              <a:srgbClr val="0369A1"/>
+            </a:solidFill>
+            <a:prstDash val="solid"/>
+          </a:ln>
+        </p:spPr>
+      </p:sp>
+      <p:sp>
+        <p:nvSpPr>
+          <p:cNvPr id="12" name="Shape 10"/>
+          <p:cNvSpPr/>
+          <p:nvPr/>
+        </p:nvSpPr>
+        <p:spPr>
+          <a:xfrm>
+            <a:off x="7657668" y="91440"/>
+            <a:ext cx="73152" cy="274320"/>
+          </a:xfrm>
+          <a:prstGeom prst="rect">
+            <a:avLst/>
+          </a:prstGeom>
+          <a:solidFill>
+            <a:srgbClr val="0369A1"/>
+          </a:solidFill>
+          <a:ln w="12700">
+            <a:solidFill>
+              <a:srgbClr val="0369A1"/>
+            </a:solidFill>
+            <a:prstDash val="solid"/>
+          </a:ln>
+        </p:spPr>
+      </p:sp>
+      <p:pic>
+        <p:nvPicPr>
+          <p:cNvPr id="13" name="Image 0" descr="preencoded.png">    </p:cNvPr>
+          <p:cNvPicPr>
+            <a:picLocks noChangeAspect="1"/>
+          </p:cNvPicPr>
+          <p:nvPr/>
+        </p:nvPicPr>
+        <p:blipFill>
+          <a:blip r:embed="rId1"/>
+          <a:stretch>
+            <a:fillRect/>
+          </a:stretch>
+        </p:blipFill>
+        <p:spPr>
+          <a:xfrm>
+            <a:off x="7785684" y="128016"/>
+            <a:ext cx="201168" cy="201168"/>
+          </a:xfrm>
+          <a:prstGeom prst="rect">
+            <a:avLst/>
+          </a:prstGeom>
+        </p:spPr>
+      </p:pic>
+      <p:sp>
+        <p:nvSpPr>
+          <p:cNvPr id="14" name="Text 11"/>
+          <p:cNvSpPr txBox="1"/>
+          <p:nvPr/>
+        </p:nvSpPr>
+        <p:spPr>
+          <a:xfrm>
+            <a:off x="8041716" y="91440"/>
+            <a:ext cx="3564763" cy="274320"/>
+          </a:xfrm>
+          <a:prstGeom prst="rect">
+            <a:avLst/>
+          </a:prstGeom>
+          <a:noFill/>
+          <a:ln/>
+        </p:spPr>
+        <p:txBody>
+          <a:bodyPr wrap="square" lIns="0" tIns="0" rIns="0" bIns="0" rtlCol="0" anchor="ctr"/>
+          <a:lstStyle/>
+          <a:p>
+            <a:pPr indent="0" marL="0">
+              <a:buNone/>
+            </a:pPr>
+            <a:r>
+              <a:rPr lang="en-US" sz="1100" b="1" dirty="0">
+                <a:solidFill>
+                  <a:srgbClr val="075985"/>
+                </a:solidFill>
+                <a:latin typeface="Calibri" pitchFamily="34" charset="0"/>
+                <a:ea typeface="Calibri" pitchFamily="34" charset="-122"/>
+                <a:cs typeface="Calibri" pitchFamily="34" charset="-120"/>
+              </a:rPr>
+              <a:t>DA COMPRENDERE OGGI</a:t>
+            </a:r>
+            <a:pPr indent="0" marL="0">
+              <a:buNone/>
+            </a:pPr>
+            <a:r>
+              <a:rPr lang="en-US" sz="1100" dirty="0">
+                <a:solidFill>
+                  <a:srgbClr val="075985"/>
+                </a:solidFill>
+                <a:latin typeface="Calibri" pitchFamily="34" charset="0"/>
+                <a:ea typeface="Calibri" pitchFamily="34" charset="-122"/>
+                <a:cs typeface="Calibri" pitchFamily="34" charset="-120"/>
+              </a:rPr>
+              <a:t> · formati delle istruzioni</a:t>
+            </a:r>
+            <a:endParaRPr lang="en-US" sz="1100" dirty="0"/>
+          </a:p>
+        </p:txBody>
+      </p:sp>
+      <p:sp>
+        <p:nvSpPr>
           <p:cNvPr id="25" name="Slide Number Placeholder 0"/>
           <p:cNvSpPr>
             <a:spLocks noGrp="1"/>
@@ -18459,6 +19906,133 @@
               <a:t>Sei formati, tutti di 32 bit. L'opcode sta sempre negli stessi sette bit, e i numeri di registro rd, rs1 e rs2 stanno sempre negli stessi posti: il processore può leggerli prima ancora di sapere di quale istruzione si tratta.</a:t>
             </a:r>
             <a:endParaRPr lang="en-US" sz="1400" dirty="0"/>
+          </a:p>
+        </p:txBody>
+      </p:sp>
+      <p:sp>
+        <p:nvSpPr>
+          <p:cNvPr id="40" name="Shape 38"/>
+          <p:cNvSpPr/>
+          <p:nvPr/>
+        </p:nvSpPr>
+        <p:spPr>
+          <a:xfrm>
+            <a:off x="7657668" y="91440"/>
+            <a:ext cx="3985387" cy="274320"/>
+          </a:xfrm>
+          <a:prstGeom prst="rect">
+            <a:avLst/>
+          </a:prstGeom>
+          <a:solidFill>
+            <a:srgbClr val="E0F2FE"/>
+          </a:solidFill>
+          <a:ln w="12700">
+            <a:solidFill>
+              <a:srgbClr val="0369A1"/>
+            </a:solidFill>
+            <a:prstDash val="solid"/>
+          </a:ln>
+        </p:spPr>
+      </p:sp>
+      <p:sp>
+        <p:nvSpPr>
+          <p:cNvPr id="41" name="Shape 39"/>
+          <p:cNvSpPr/>
+          <p:nvPr/>
+        </p:nvSpPr>
+        <p:spPr>
+          <a:xfrm>
+            <a:off x="7657668" y="91440"/>
+            <a:ext cx="73152" cy="274320"/>
+          </a:xfrm>
+          <a:prstGeom prst="rect">
+            <a:avLst/>
+          </a:prstGeom>
+          <a:solidFill>
+            <a:srgbClr val="0369A1"/>
+          </a:solidFill>
+          <a:ln w="12700">
+            <a:solidFill>
+              <a:srgbClr val="0369A1"/>
+            </a:solidFill>
+            <a:prstDash val="solid"/>
+          </a:ln>
+        </p:spPr>
+      </p:sp>
+      <p:pic>
+        <p:nvPicPr>
+          <p:cNvPr id="42" name="Image 0" descr="preencoded.png">    </p:cNvPr>
+          <p:cNvPicPr>
+            <a:picLocks noChangeAspect="1"/>
+          </p:cNvPicPr>
+          <p:nvPr/>
+        </p:nvPicPr>
+        <p:blipFill>
+          <a:blip r:embed="rId1"/>
+          <a:stretch>
+            <a:fillRect/>
+          </a:stretch>
+        </p:blipFill>
+        <p:spPr>
+          <a:xfrm>
+            <a:off x="7785684" y="128016"/>
+            <a:ext cx="201168" cy="201168"/>
+          </a:xfrm>
+          <a:prstGeom prst="rect">
+            <a:avLst/>
+          </a:prstGeom>
+        </p:spPr>
+      </p:pic>
+      <p:sp>
+        <p:nvSpPr>
+          <p:cNvPr id="43" name="Text 40"/>
+          <p:cNvSpPr txBox="1"/>
+          <p:nvPr/>
+        </p:nvSpPr>
+        <p:spPr>
+          <a:xfrm>
+            <a:off x="8041716" y="91440"/>
+            <a:ext cx="3564763" cy="274320"/>
+          </a:xfrm>
+          <a:prstGeom prst="rect">
+            <a:avLst/>
+          </a:prstGeom>
+          <a:noFill/>
+          <a:ln/>
+        </p:spPr>
+        <p:txBody>
+          <a:bodyPr wrap="square" lIns="0" tIns="0" rIns="0" bIns="0" rtlCol="0" anchor="ctr"/>
+          <a:lstStyle/>
+          <a:p>
+            <a:pPr indent="0" marL="0">
+              <a:buNone/>
+            </a:pPr>
+            <a:r>
+              <a:rPr lang="en-US" sz="1100" b="1" dirty="0">
+                <a:solidFill>
+                  <a:srgbClr val="075985"/>
+                </a:solidFill>
+                <a:latin typeface="Calibri" pitchFamily="34" charset="0"/>
+                <a:ea typeface="Calibri" pitchFamily="34" charset="-122"/>
+                <a:cs typeface="Calibri" pitchFamily="34" charset="-120"/>
+              </a:rPr>
+              <a:t>DA COMPRENDERE OGGI</a:t>
+            </a:r>
+            <a:pPr indent="0" marL="0">
+              <a:buNone/>
+            </a:pPr>
+            <a:r>
+              <a:rPr lang="en-US" sz="1100" dirty="0">
+                <a:solidFill>
+                  <a:srgbClr val="075985"/>
+                </a:solidFill>
+                <a:latin typeface="Calibri" pitchFamily="34" charset="0"/>
+                <a:ea typeface="Calibri" pitchFamily="34" charset="-122"/>
+                <a:cs typeface="Calibri" pitchFamily="34" charset="-120"/>
+              </a:rPr>
+              <a:t> · formati delle istruzioni</a:t>
+            </a:r>
+            <a:endParaRPr lang="en-US" sz="1100" dirty="0"/>
           </a:p>
         </p:txBody>
       </p:sp>
@@ -19845,6 +21419,133 @@
       </p:graphicFrame>
       <p:sp>
         <p:nvSpPr>
+          <p:cNvPr id="4" name="Shape 1"/>
+          <p:cNvSpPr/>
+          <p:nvPr/>
+        </p:nvSpPr>
+        <p:spPr>
+          <a:xfrm>
+            <a:off x="7657668" y="91440"/>
+            <a:ext cx="3985387" cy="274320"/>
+          </a:xfrm>
+          <a:prstGeom prst="rect">
+            <a:avLst/>
+          </a:prstGeom>
+          <a:solidFill>
+            <a:srgbClr val="E0F2FE"/>
+          </a:solidFill>
+          <a:ln w="12700">
+            <a:solidFill>
+              <a:srgbClr val="0369A1"/>
+            </a:solidFill>
+            <a:prstDash val="solid"/>
+          </a:ln>
+        </p:spPr>
+      </p:sp>
+      <p:sp>
+        <p:nvSpPr>
+          <p:cNvPr id="5" name="Shape 2"/>
+          <p:cNvSpPr/>
+          <p:nvPr/>
+        </p:nvSpPr>
+        <p:spPr>
+          <a:xfrm>
+            <a:off x="7657668" y="91440"/>
+            <a:ext cx="73152" cy="274320"/>
+          </a:xfrm>
+          <a:prstGeom prst="rect">
+            <a:avLst/>
+          </a:prstGeom>
+          <a:solidFill>
+            <a:srgbClr val="0369A1"/>
+          </a:solidFill>
+          <a:ln w="12700">
+            <a:solidFill>
+              <a:srgbClr val="0369A1"/>
+            </a:solidFill>
+            <a:prstDash val="solid"/>
+          </a:ln>
+        </p:spPr>
+      </p:sp>
+      <p:pic>
+        <p:nvPicPr>
+          <p:cNvPr id="6" name="Image 0" descr="preencoded.png">    </p:cNvPr>
+          <p:cNvPicPr>
+            <a:picLocks noChangeAspect="1"/>
+          </p:cNvPicPr>
+          <p:nvPr/>
+        </p:nvPicPr>
+        <p:blipFill>
+          <a:blip r:embed="rId1"/>
+          <a:stretch>
+            <a:fillRect/>
+          </a:stretch>
+        </p:blipFill>
+        <p:spPr>
+          <a:xfrm>
+            <a:off x="7785684" y="128016"/>
+            <a:ext cx="201168" cy="201168"/>
+          </a:xfrm>
+          <a:prstGeom prst="rect">
+            <a:avLst/>
+          </a:prstGeom>
+        </p:spPr>
+      </p:pic>
+      <p:sp>
+        <p:nvSpPr>
+          <p:cNvPr id="7" name="Text 3"/>
+          <p:cNvSpPr txBox="1"/>
+          <p:nvPr/>
+        </p:nvSpPr>
+        <p:spPr>
+          <a:xfrm>
+            <a:off x="8041716" y="91440"/>
+            <a:ext cx="3564763" cy="274320"/>
+          </a:xfrm>
+          <a:prstGeom prst="rect">
+            <a:avLst/>
+          </a:prstGeom>
+          <a:noFill/>
+          <a:ln/>
+        </p:spPr>
+        <p:txBody>
+          <a:bodyPr wrap="square" lIns="0" tIns="0" rIns="0" bIns="0" rtlCol="0" anchor="ctr"/>
+          <a:lstStyle/>
+          <a:p>
+            <a:pPr indent="0" marL="0">
+              <a:buNone/>
+            </a:pPr>
+            <a:r>
+              <a:rPr lang="en-US" sz="1100" b="1" dirty="0">
+                <a:solidFill>
+                  <a:srgbClr val="075985"/>
+                </a:solidFill>
+                <a:latin typeface="Calibri" pitchFamily="34" charset="0"/>
+                <a:ea typeface="Calibri" pitchFamily="34" charset="-122"/>
+                <a:cs typeface="Calibri" pitchFamily="34" charset="-120"/>
+              </a:rPr>
+              <a:t>DA COMPRENDERE OGGI</a:t>
+            </a:r>
+            <a:pPr indent="0" marL="0">
+              <a:buNone/>
+            </a:pPr>
+            <a:r>
+              <a:rPr lang="en-US" sz="1100" dirty="0">
+                <a:solidFill>
+                  <a:srgbClr val="075985"/>
+                </a:solidFill>
+                <a:latin typeface="Calibri" pitchFamily="34" charset="0"/>
+                <a:ea typeface="Calibri" pitchFamily="34" charset="-122"/>
+                <a:cs typeface="Calibri" pitchFamily="34" charset="-120"/>
+              </a:rPr>
+              <a:t> · i modi di indirizzamento</a:t>
+            </a:r>
+            <a:endParaRPr lang="en-US" sz="1100" dirty="0"/>
+          </a:p>
+        </p:txBody>
+      </p:sp>
+      <p:sp>
+        <p:nvSpPr>
           <p:cNvPr id="25" name="Slide Number Placeholder 0"/>
           <p:cNvSpPr>
             <a:spLocks noGrp="1"/>
@@ -20685,6 +22386,133 @@
               <a:t>Dopo una fase di avvio, il bootstrap, il processore ripete questo ciclo all'infinito. Nei processori con modi di indirizzamento ricchi, una fase di operand assembly raccoglie gli operandi prima dell'esecuzione.</a:t>
             </a:r>
             <a:endParaRPr lang="en-US" sz="2000" dirty="0"/>
+          </a:p>
+        </p:txBody>
+      </p:sp>
+      <p:sp>
+        <p:nvSpPr>
+          <p:cNvPr id="24" name="Shape 22"/>
+          <p:cNvSpPr/>
+          <p:nvPr/>
+        </p:nvSpPr>
+        <p:spPr>
+          <a:xfrm>
+            <a:off x="7723327" y="91440"/>
+            <a:ext cx="3919728" cy="274320"/>
+          </a:xfrm>
+          <a:prstGeom prst="rect">
+            <a:avLst/>
+          </a:prstGeom>
+          <a:solidFill>
+            <a:srgbClr val="E0F2FE"/>
+          </a:solidFill>
+          <a:ln w="12700">
+            <a:solidFill>
+              <a:srgbClr val="0369A1"/>
+            </a:solidFill>
+            <a:prstDash val="solid"/>
+          </a:ln>
+        </p:spPr>
+      </p:sp>
+      <p:sp>
+        <p:nvSpPr>
+          <p:cNvPr id="25" name="Shape 23"/>
+          <p:cNvSpPr/>
+          <p:nvPr/>
+        </p:nvSpPr>
+        <p:spPr>
+          <a:xfrm>
+            <a:off x="7723327" y="91440"/>
+            <a:ext cx="73152" cy="274320"/>
+          </a:xfrm>
+          <a:prstGeom prst="rect">
+            <a:avLst/>
+          </a:prstGeom>
+          <a:solidFill>
+            <a:srgbClr val="0369A1"/>
+          </a:solidFill>
+          <a:ln w="12700">
+            <a:solidFill>
+              <a:srgbClr val="0369A1"/>
+            </a:solidFill>
+            <a:prstDash val="solid"/>
+          </a:ln>
+        </p:spPr>
+      </p:sp>
+      <p:pic>
+        <p:nvPicPr>
+          <p:cNvPr id="26" name="Image 0" descr="preencoded.png">    </p:cNvPr>
+          <p:cNvPicPr>
+            <a:picLocks noChangeAspect="1"/>
+          </p:cNvPicPr>
+          <p:nvPr/>
+        </p:nvPicPr>
+        <p:blipFill>
+          <a:blip r:embed="rId1"/>
+          <a:stretch>
+            <a:fillRect/>
+          </a:stretch>
+        </p:blipFill>
+        <p:spPr>
+          <a:xfrm>
+            <a:off x="7851343" y="128016"/>
+            <a:ext cx="201168" cy="201168"/>
+          </a:xfrm>
+          <a:prstGeom prst="rect">
+            <a:avLst/>
+          </a:prstGeom>
+        </p:spPr>
+      </p:pic>
+      <p:sp>
+        <p:nvSpPr>
+          <p:cNvPr id="27" name="Text 24"/>
+          <p:cNvSpPr txBox="1"/>
+          <p:nvPr/>
+        </p:nvSpPr>
+        <p:spPr>
+          <a:xfrm>
+            <a:off x="8107375" y="91440"/>
+            <a:ext cx="3499104" cy="274320"/>
+          </a:xfrm>
+          <a:prstGeom prst="rect">
+            <a:avLst/>
+          </a:prstGeom>
+          <a:noFill/>
+          <a:ln/>
+        </p:spPr>
+        <p:txBody>
+          <a:bodyPr wrap="square" lIns="0" tIns="0" rIns="0" bIns="0" rtlCol="0" anchor="ctr"/>
+          <a:lstStyle/>
+          <a:p>
+            <a:pPr indent="0" marL="0">
+              <a:buNone/>
+            </a:pPr>
+            <a:r>
+              <a:rPr lang="en-US" sz="1100" b="1" dirty="0">
+                <a:solidFill>
+                  <a:srgbClr val="075985"/>
+                </a:solidFill>
+                <a:latin typeface="Calibri" pitchFamily="34" charset="0"/>
+                <a:ea typeface="Calibri" pitchFamily="34" charset="-122"/>
+                <a:cs typeface="Calibri" pitchFamily="34" charset="-120"/>
+              </a:rPr>
+              <a:t>DA COMPRENDERE OGGI</a:t>
+            </a:r>
+            <a:pPr indent="0" marL="0">
+              <a:buNone/>
+            </a:pPr>
+            <a:r>
+              <a:rPr lang="en-US" sz="1100" dirty="0">
+                <a:solidFill>
+                  <a:srgbClr val="075985"/>
+                </a:solidFill>
+                <a:latin typeface="Calibri" pitchFamily="34" charset="0"/>
+                <a:ea typeface="Calibri" pitchFamily="34" charset="-122"/>
+                <a:cs typeface="Calibri" pitchFamily="34" charset="-120"/>
+              </a:rPr>
+              <a:t> · il ciclo del processore</a:t>
+            </a:r>
+            <a:endParaRPr lang="en-US" sz="1100" dirty="0"/>
           </a:p>
         </p:txBody>
       </p:sp>
@@ -24047,6 +25875,133 @@
       </p:sp>
       <p:sp>
         <p:nvSpPr>
+          <p:cNvPr id="12" name="Shape 9"/>
+          <p:cNvSpPr/>
+          <p:nvPr/>
+        </p:nvSpPr>
+        <p:spPr>
+          <a:xfrm>
+            <a:off x="7723327" y="91440"/>
+            <a:ext cx="3919728" cy="274320"/>
+          </a:xfrm>
+          <a:prstGeom prst="rect">
+            <a:avLst/>
+          </a:prstGeom>
+          <a:solidFill>
+            <a:srgbClr val="E0F2FE"/>
+          </a:solidFill>
+          <a:ln w="12700">
+            <a:solidFill>
+              <a:srgbClr val="0369A1"/>
+            </a:solidFill>
+            <a:prstDash val="solid"/>
+          </a:ln>
+        </p:spPr>
+      </p:sp>
+      <p:sp>
+        <p:nvSpPr>
+          <p:cNvPr id="13" name="Shape 10"/>
+          <p:cNvSpPr/>
+          <p:nvPr/>
+        </p:nvSpPr>
+        <p:spPr>
+          <a:xfrm>
+            <a:off x="7723327" y="91440"/>
+            <a:ext cx="73152" cy="274320"/>
+          </a:xfrm>
+          <a:prstGeom prst="rect">
+            <a:avLst/>
+          </a:prstGeom>
+          <a:solidFill>
+            <a:srgbClr val="0369A1"/>
+          </a:solidFill>
+          <a:ln w="12700">
+            <a:solidFill>
+              <a:srgbClr val="0369A1"/>
+            </a:solidFill>
+            <a:prstDash val="solid"/>
+          </a:ln>
+        </p:spPr>
+      </p:sp>
+      <p:pic>
+        <p:nvPicPr>
+          <p:cNvPr id="14" name="Image 0" descr="preencoded.png">    </p:cNvPr>
+          <p:cNvPicPr>
+            <a:picLocks noChangeAspect="1"/>
+          </p:cNvPicPr>
+          <p:nvPr/>
+        </p:nvPicPr>
+        <p:blipFill>
+          <a:blip r:embed="rId1"/>
+          <a:stretch>
+            <a:fillRect/>
+          </a:stretch>
+        </p:blipFill>
+        <p:spPr>
+          <a:xfrm>
+            <a:off x="7851343" y="128016"/>
+            <a:ext cx="201168" cy="201168"/>
+          </a:xfrm>
+          <a:prstGeom prst="rect">
+            <a:avLst/>
+          </a:prstGeom>
+        </p:spPr>
+      </p:pic>
+      <p:sp>
+        <p:nvSpPr>
+          <p:cNvPr id="15" name="Text 11"/>
+          <p:cNvSpPr txBox="1"/>
+          <p:nvPr/>
+        </p:nvSpPr>
+        <p:spPr>
+          <a:xfrm>
+            <a:off x="8107375" y="91440"/>
+            <a:ext cx="3499104" cy="274320"/>
+          </a:xfrm>
+          <a:prstGeom prst="rect">
+            <a:avLst/>
+          </a:prstGeom>
+          <a:noFill/>
+          <a:ln/>
+        </p:spPr>
+        <p:txBody>
+          <a:bodyPr wrap="square" lIns="0" tIns="0" rIns="0" bIns="0" rtlCol="0" anchor="ctr"/>
+          <a:lstStyle/>
+          <a:p>
+            <a:pPr indent="0" marL="0">
+              <a:buNone/>
+            </a:pPr>
+            <a:r>
+              <a:rPr lang="en-US" sz="1100" b="1" dirty="0">
+                <a:solidFill>
+                  <a:srgbClr val="075985"/>
+                </a:solidFill>
+                <a:latin typeface="Calibri" pitchFamily="34" charset="0"/>
+                <a:ea typeface="Calibri" pitchFamily="34" charset="-122"/>
+                <a:cs typeface="Calibri" pitchFamily="34" charset="-120"/>
+              </a:rPr>
+              <a:t>DA COMPRENDERE OGGI</a:t>
+            </a:r>
+            <a:pPr indent="0" marL="0">
+              <a:buNone/>
+            </a:pPr>
+            <a:r>
+              <a:rPr lang="en-US" sz="1100" dirty="0">
+                <a:solidFill>
+                  <a:srgbClr val="075985"/>
+                </a:solidFill>
+                <a:latin typeface="Calibri" pitchFamily="34" charset="0"/>
+                <a:ea typeface="Calibri" pitchFamily="34" charset="-122"/>
+                <a:cs typeface="Calibri" pitchFamily="34" charset="-120"/>
+              </a:rPr>
+              <a:t> · il ciclo del processore</a:t>
+            </a:r>
+            <a:endParaRPr lang="en-US" sz="1100" dirty="0"/>
+          </a:p>
+        </p:txBody>
+      </p:sp>
+      <p:sp>
+        <p:nvSpPr>
           <p:cNvPr id="25" name="Slide Number Placeholder 0"/>
           <p:cNvSpPr>
             <a:spLocks noGrp="1"/>
@@ -24534,6 +26489,133 @@
       </p:sp>
       <p:sp>
         <p:nvSpPr>
+          <p:cNvPr id="14" name="Shape 12"/>
+          <p:cNvSpPr/>
+          <p:nvPr/>
+        </p:nvSpPr>
+        <p:spPr>
+          <a:xfrm>
+            <a:off x="7985963" y="91440"/>
+            <a:ext cx="3657092" cy="274320"/>
+          </a:xfrm>
+          <a:prstGeom prst="rect">
+            <a:avLst/>
+          </a:prstGeom>
+          <a:solidFill>
+            <a:srgbClr val="E0F2FE"/>
+          </a:solidFill>
+          <a:ln w="12700">
+            <a:solidFill>
+              <a:srgbClr val="0369A1"/>
+            </a:solidFill>
+            <a:prstDash val="solid"/>
+          </a:ln>
+        </p:spPr>
+      </p:sp>
+      <p:sp>
+        <p:nvSpPr>
+          <p:cNvPr id="15" name="Shape 13"/>
+          <p:cNvSpPr/>
+          <p:nvPr/>
+        </p:nvSpPr>
+        <p:spPr>
+          <a:xfrm>
+            <a:off x="7985963" y="91440"/>
+            <a:ext cx="73152" cy="274320"/>
+          </a:xfrm>
+          <a:prstGeom prst="rect">
+            <a:avLst/>
+          </a:prstGeom>
+          <a:solidFill>
+            <a:srgbClr val="0369A1"/>
+          </a:solidFill>
+          <a:ln w="12700">
+            <a:solidFill>
+              <a:srgbClr val="0369A1"/>
+            </a:solidFill>
+            <a:prstDash val="solid"/>
+          </a:ln>
+        </p:spPr>
+      </p:sp>
+      <p:pic>
+        <p:nvPicPr>
+          <p:cNvPr id="16" name="Image 0" descr="preencoded.png">    </p:cNvPr>
+          <p:cNvPicPr>
+            <a:picLocks noChangeAspect="1"/>
+          </p:cNvPicPr>
+          <p:nvPr/>
+        </p:nvPicPr>
+        <p:blipFill>
+          <a:blip r:embed="rId1"/>
+          <a:stretch>
+            <a:fillRect/>
+          </a:stretch>
+        </p:blipFill>
+        <p:spPr>
+          <a:xfrm>
+            <a:off x="8113979" y="128016"/>
+            <a:ext cx="201168" cy="201168"/>
+          </a:xfrm>
+          <a:prstGeom prst="rect">
+            <a:avLst/>
+          </a:prstGeom>
+        </p:spPr>
+      </p:pic>
+      <p:sp>
+        <p:nvSpPr>
+          <p:cNvPr id="17" name="Text 14"/>
+          <p:cNvSpPr txBox="1"/>
+          <p:nvPr/>
+        </p:nvSpPr>
+        <p:spPr>
+          <a:xfrm>
+            <a:off x="8370011" y="91440"/>
+            <a:ext cx="3236468" cy="274320"/>
+          </a:xfrm>
+          <a:prstGeom prst="rect">
+            <a:avLst/>
+          </a:prstGeom>
+          <a:noFill/>
+          <a:ln/>
+        </p:spPr>
+        <p:txBody>
+          <a:bodyPr wrap="square" lIns="0" tIns="0" rIns="0" bIns="0" rtlCol="0" anchor="ctr"/>
+          <a:lstStyle/>
+          <a:p>
+            <a:pPr indent="0" marL="0">
+              <a:buNone/>
+            </a:pPr>
+            <a:r>
+              <a:rPr lang="en-US" sz="1100" b="1" dirty="0">
+                <a:solidFill>
+                  <a:srgbClr val="075985"/>
+                </a:solidFill>
+                <a:latin typeface="Calibri" pitchFamily="34" charset="0"/>
+                <a:ea typeface="Calibri" pitchFamily="34" charset="-122"/>
+                <a:cs typeface="Calibri" pitchFamily="34" charset="-120"/>
+              </a:rPr>
+              <a:t>DA COMPRENDERE OGGI</a:t>
+            </a:r>
+            <a:pPr indent="0" marL="0">
+              <a:buNone/>
+            </a:pPr>
+            <a:r>
+              <a:rPr lang="en-US" sz="1100" dirty="0">
+                <a:solidFill>
+                  <a:srgbClr val="075985"/>
+                </a:solidFill>
+                <a:latin typeface="Calibri" pitchFamily="34" charset="0"/>
+                <a:ea typeface="Calibri" pitchFamily="34" charset="-122"/>
+                <a:cs typeface="Calibri" pitchFamily="34" charset="-120"/>
+              </a:rPr>
+              <a:t> · interruzioni e trap</a:t>
+            </a:r>
+            <a:endParaRPr lang="en-US" sz="1100" dirty="0"/>
+          </a:p>
+        </p:txBody>
+      </p:sp>
+      <p:sp>
+        <p:nvSpPr>
           <p:cNvPr id="25" name="Slide Number Placeholder 0"/>
           <p:cNvSpPr>
             <a:spLocks noGrp="1"/>
@@ -24949,6 +27031,133 @@
               <a:t>Una trap è il trasferimento del controllo a un gestore che segue l'una o l'altra</a:t>
             </a:r>
             <a:endParaRPr lang="en-US" sz="2400" dirty="0"/>
+          </a:p>
+        </p:txBody>
+      </p:sp>
+      <p:sp>
+        <p:nvSpPr>
+          <p:cNvPr id="12" name="Shape 10"/>
+          <p:cNvSpPr/>
+          <p:nvPr/>
+        </p:nvSpPr>
+        <p:spPr>
+          <a:xfrm>
+            <a:off x="7985963" y="91440"/>
+            <a:ext cx="3657092" cy="274320"/>
+          </a:xfrm>
+          <a:prstGeom prst="rect">
+            <a:avLst/>
+          </a:prstGeom>
+          <a:solidFill>
+            <a:srgbClr val="E0F2FE"/>
+          </a:solidFill>
+          <a:ln w="12700">
+            <a:solidFill>
+              <a:srgbClr val="0369A1"/>
+            </a:solidFill>
+            <a:prstDash val="solid"/>
+          </a:ln>
+        </p:spPr>
+      </p:sp>
+      <p:sp>
+        <p:nvSpPr>
+          <p:cNvPr id="13" name="Shape 11"/>
+          <p:cNvSpPr/>
+          <p:nvPr/>
+        </p:nvSpPr>
+        <p:spPr>
+          <a:xfrm>
+            <a:off x="7985963" y="91440"/>
+            <a:ext cx="73152" cy="274320"/>
+          </a:xfrm>
+          <a:prstGeom prst="rect">
+            <a:avLst/>
+          </a:prstGeom>
+          <a:solidFill>
+            <a:srgbClr val="0369A1"/>
+          </a:solidFill>
+          <a:ln w="12700">
+            <a:solidFill>
+              <a:srgbClr val="0369A1"/>
+            </a:solidFill>
+            <a:prstDash val="solid"/>
+          </a:ln>
+        </p:spPr>
+      </p:sp>
+      <p:pic>
+        <p:nvPicPr>
+          <p:cNvPr id="14" name="Image 0" descr="preencoded.png">    </p:cNvPr>
+          <p:cNvPicPr>
+            <a:picLocks noChangeAspect="1"/>
+          </p:cNvPicPr>
+          <p:nvPr/>
+        </p:nvPicPr>
+        <p:blipFill>
+          <a:blip r:embed="rId1"/>
+          <a:stretch>
+            <a:fillRect/>
+          </a:stretch>
+        </p:blipFill>
+        <p:spPr>
+          <a:xfrm>
+            <a:off x="8113979" y="128016"/>
+            <a:ext cx="201168" cy="201168"/>
+          </a:xfrm>
+          <a:prstGeom prst="rect">
+            <a:avLst/>
+          </a:prstGeom>
+        </p:spPr>
+      </p:pic>
+      <p:sp>
+        <p:nvSpPr>
+          <p:cNvPr id="15" name="Text 12"/>
+          <p:cNvSpPr txBox="1"/>
+          <p:nvPr/>
+        </p:nvSpPr>
+        <p:spPr>
+          <a:xfrm>
+            <a:off x="8370011" y="91440"/>
+            <a:ext cx="3236468" cy="274320"/>
+          </a:xfrm>
+          <a:prstGeom prst="rect">
+            <a:avLst/>
+          </a:prstGeom>
+          <a:noFill/>
+          <a:ln/>
+        </p:spPr>
+        <p:txBody>
+          <a:bodyPr wrap="square" lIns="0" tIns="0" rIns="0" bIns="0" rtlCol="0" anchor="ctr"/>
+          <a:lstStyle/>
+          <a:p>
+            <a:pPr indent="0" marL="0">
+              <a:buNone/>
+            </a:pPr>
+            <a:r>
+              <a:rPr lang="en-US" sz="1100" b="1" dirty="0">
+                <a:solidFill>
+                  <a:srgbClr val="075985"/>
+                </a:solidFill>
+                <a:latin typeface="Calibri" pitchFamily="34" charset="0"/>
+                <a:ea typeface="Calibri" pitchFamily="34" charset="-122"/>
+                <a:cs typeface="Calibri" pitchFamily="34" charset="-120"/>
+              </a:rPr>
+              <a:t>DA COMPRENDERE OGGI</a:t>
+            </a:r>
+            <a:pPr indent="0" marL="0">
+              <a:buNone/>
+            </a:pPr>
+            <a:r>
+              <a:rPr lang="en-US" sz="1100" dirty="0">
+                <a:solidFill>
+                  <a:srgbClr val="075985"/>
+                </a:solidFill>
+                <a:latin typeface="Calibri" pitchFamily="34" charset="0"/>
+                <a:ea typeface="Calibri" pitchFamily="34" charset="-122"/>
+                <a:cs typeface="Calibri" pitchFamily="34" charset="-120"/>
+              </a:rPr>
+              <a:t> · interruzioni e trap</a:t>
+            </a:r>
+            <a:endParaRPr lang="en-US" sz="1100" dirty="0"/>
           </a:p>
         </p:txBody>
       </p:sp>

--- a/it/slides/19-Architettura_dei_Calcolatori-Istruzioni_e_Interruzioni.pptx
+++ b/it/slides/19-Architettura_dei_Calcolatori-Istruzioni_e_Interruzioni.pptx
@@ -126,26 +126,26 @@
   <p:extLst>
     <p:ext uri="{521415D9-36F7-43E2-AB2F-B90AF26B5E84}">
       <p14:sectionLst xmlns:p14="http://schemas.microsoft.com/office/powerpoint/2010/main">
-        <p14:section name="Apertura" id="{d61dede6-eca1-78e0-7b5b-55e21dc4a104}">
+        <p14:section name="Apertura" id="{8a7b16e2-b034-1c5b-aea2-9dcaefcc34e1}">
           <p14:sldIdLst>
             <p14:sldId id="256"/>
             <p14:sldId id="257"/>
           </p14:sldIdLst>
         </p14:section>
-        <p14:section name="Istruzioni" id="{bd41d6e4-125c-0809-ddbc-baf06fd5d7ac}">
+        <p14:section name="Istruzioni" id="{41c1cef6-dade-5f7c-5a0e-df1a7f731f40}">
           <p14:sldIdLst>
             <p14:sldId id="258"/>
             <p14:sldId id="259"/>
             <p14:sldId id="260"/>
           </p14:sldIdLst>
         </p14:section>
-        <p14:section name="Il ciclo del processore" id="{72cbbae5-2c4d-179c-b013-02724e46c97d}">
+        <p14:section name="Il ciclo del processore" id="{63c0e7d4-cf11-5307-840a-394f1d168d9b}">
           <p14:sldIdLst>
             <p14:sldId id="261"/>
             <p14:sldId id="262"/>
           </p14:sldIdLst>
         </p14:section>
-        <p14:section name="Interruzioni" id="{f28e8a87-11ae-dcb7-68ae-f4259f9bc0fa}">
+        <p14:section name="Interruzioni" id="{fd44ebef-a678-cd4f-0739-d533b3f726ab}">
           <p14:sldIdLst>
             <p14:sldId id="263"/>
             <p14:sldId id="264"/>
@@ -154,7 +154,7 @@
             <p14:sldId id="267"/>
           </p14:sldIdLst>
         </p14:section>
-        <p14:section name="La soluzione di RISC-V" id="{86d55fb1-c8fb-8d24-4585-fdebb4a79d00}">
+        <p14:section name="La soluzione di RISC-V" id="{06f0f712-82b5-419f-0972-f8ad0c461d82}">
           <p14:sldIdLst>
             <p14:sldId id="268"/>
             <p14:sldId id="269"/>

--- a/it/slides/19-Architettura_dei_Calcolatori-Istruzioni_e_Interruzioni.pptx
+++ b/it/slides/19-Architettura_dei_Calcolatori-Istruzioni_e_Interruzioni.pptx
@@ -126,26 +126,26 @@
   <p:extLst>
     <p:ext uri="{521415D9-36F7-43E2-AB2F-B90AF26B5E84}">
       <p14:sectionLst xmlns:p14="http://schemas.microsoft.com/office/powerpoint/2010/main">
-        <p14:section name="Apertura" id="{8a7b16e2-b034-1c5b-aea2-9dcaefcc34e1}">
+        <p14:section name="Apertura" id="{6d0dbdf5-bf46-7c94-bb0b-e0c2dc988d5f}">
           <p14:sldIdLst>
             <p14:sldId id="256"/>
             <p14:sldId id="257"/>
           </p14:sldIdLst>
         </p14:section>
-        <p14:section name="Istruzioni" id="{41c1cef6-dade-5f7c-5a0e-df1a7f731f40}">
+        <p14:section name="Istruzioni" id="{5bb200c5-edec-efcb-701f-e97b2803317b}">
           <p14:sldIdLst>
             <p14:sldId id="258"/>
             <p14:sldId id="259"/>
             <p14:sldId id="260"/>
           </p14:sldIdLst>
         </p14:section>
-        <p14:section name="Il ciclo del processore" id="{63c0e7d4-cf11-5307-840a-394f1d168d9b}">
+        <p14:section name="Il ciclo del processore" id="{2de7192d-c318-5725-016c-64d6038f1ca9}">
           <p14:sldIdLst>
             <p14:sldId id="261"/>
             <p14:sldId id="262"/>
           </p14:sldIdLst>
         </p14:section>
-        <p14:section name="Interruzioni" id="{fd44ebef-a678-cd4f-0739-d533b3f726ab}">
+        <p14:section name="Interruzioni" id="{60f5737e-6bc2-07a0-086e-c953dfc29faf}">
           <p14:sldIdLst>
             <p14:sldId id="263"/>
             <p14:sldId id="264"/>
@@ -154,7 +154,7 @@
             <p14:sldId id="267"/>
           </p14:sldIdLst>
         </p14:section>
-        <p14:section name="La soluzione di RISC-V" id="{06f0f712-82b5-419f-0972-f8ad0c461d82}">
+        <p14:section name="La soluzione di RISC-V" id="{a7dd7187-8cde-6fab-194a-0201ee65603e}">
           <p14:sldIdLst>
             <p14:sldId id="268"/>
             <p14:sldId id="269"/>
@@ -570,7 +570,7 @@
           <a:p>
             <a:r>
               <a:rPr lang="en-US" dirty="0"/>
-              <a:t>La lezione precedente ha descritto di che cosa è fatto un processore. Questa descrive che cosa fa. Ha due metà. La prima segue una singola istruzione: come è codificata in 32 bit e quali passi compie il processore per eseguirla. La seconda spiega che cosa succede quando arriva qualcosa di più urgente del programma in corso, un timer, un dispositivo, un errore, e il processore deve lasciare ciò che sta facendo e tornarci dopo. La battuta in copertina è quasi vera, come vedrete.
+              <a:t>La lezione precedente ha descritto di che cosa è fatto un processore; questa descrive che cosa fa. Ha due metà. La prima segue una singola istruzione: come è codificata in 32 bit e quali passi compie il processore per eseguirla. La seconda spiega che cosa accade quando arriva qualcosa di più urgente del programma corrente, un timer, un dispositivo o un errore, così che il processore debba sospendere il suo lavoro e riprenderlo più tardi. Le due metà sono collegate: l'interruzione è una modifica proprio del ciclo che la prima metà descrive. La battuta in copertina, come si vedrà, è quasi letteralmente vera.
 Stato di apprendimento: DA COMPRENDERE OGGI, alla fine di questa lezione lo spiegate, lo seguite passo passo e lo applicate da soli; DA UTILIZZARE OGGI, oggi seguite e usate la ricetta; come funziona dentro si spiega più avanti, o non fa parte del corso; DA COMPRENDERE PIÙ AVANTI, riconoscete il nome e lo scopo; lo spiega una lezione successiva. Una slide senza etichetta è contesto: una storia, un esempio, una domanda, un esercizio.
 Stato di apprendimento di questa lezione. DA COMPRENDERE OGGI: formati delle istruzioni; i modi di indirizzamento; il ciclo del processore; interruzioni e trap. DA UTILIZZARE OGGI: il programma completo, gli strumenti di PRG32 (si usa, non si studia, in questo corso). DA COMPRENDERE PIÙ AVANTI: niente. Una slide senza etichetta è contesto: una storia, un esempio, una domanda, un esercizio.
 Per il docente: La presentazione originale usava una macchina a parole di 16 bit per la fase di fetch e il Motorola MC68000 per interruzioni vettorizzate e priorità. Entrambi sono sostituiti da RISC-V: i sei formati di istruzione, i cinque stadi classici, e il meccanismo delle trap in modo macchina (mtvec, mepc, mcause, mstatus, mret). Una slide di confronto conserva il 68000 come controparte storica.</a:t>
@@ -661,7 +661,7 @@
           <a:p>
             <a:r>
               <a:rPr lang="en-US" dirty="0"/>
-              <a:t>Il ciclo reale. Dopo il bootstrap il processore preleva, decodifica ed esegue; poi, alla fine di ogni istruzione, controlla se c'è un'interruzione in attesa. Se no, torna al prelievo. Se sì, accoglie la trap: passa allo stato privilegiato e comincia a eseguire una routine del sistema, il gestore. Quando il gestore termina, il programma sospeso riprende come se nulla fosse accaduto. Seguite i due percorsi sul diagramma: l'anello corto è il caso normale.
+              <a:t>Il ciclo reale. Dopo l'avvio il processore preleva, decodifica ed esegue; poi, al termine di ogni istruzione, verifica se c'è un'interruzione in attesa. Se non ce n'è, torna al prelievo. Se ce n'è una, prende la trap: entra nello stato privilegiato e comincia a eseguire una routine di sistema, il gestore. Quando il gestore termina, il programma sospeso riprende come se nulla fosse accaduto. I due percorsi del diagramma vanno seguiti; il ciclo breve è il caso comune.
 DA COMPRENDERE OGGI: interruzioni e trap.
 Per il docente: Ciclo del processore reale. In RISC-V lo «stato supervisore» è il modo macchina, e la prima istruzione prelevata dopo la trap è quella all'indirizzo contenuto in mtvec.</a:t>
             </a:r>
@@ -751,7 +751,7 @@
           <a:p>
             <a:r>
               <a:rPr lang="en-US" dirty="0"/>
-              <a:t>Sei cause di interruzione. Un'interruzione periodica da un timer, per ripartire il processore tra i programmi. Un'interruzione di I/O, con cui una periferica segnala di essere pronta. Gli errori nel programma, come un'istruzione inesistente: sono le eccezioni. I guasti del sistema: alimentazione, temperatura. Il reset, che riporta tutto a uno stato noto. E l'interruzione software, con cui un programma chiede un servizio al sistema operativo: in RISC-V è l'istruzione ecall.
+              <a:t>Sei cause di interruzione. Un'interruzione periodica da un timer, usata per condividere il processore tra programmi. Un'interruzione di I/O, con cui una periferica segnala di essere pronta. Gli errori di programma, come un'istruzione che non esiste: sono le eccezioni. I guasti di sistema: alimentazione, temperatura. Il reset, che riporta tutto a uno stato noto. E l'interruzione software, con cui un programma chiede un servizio al sistema operativo: in RISC-V, l'istruzione ecall.
 DA COMPRENDERE OGGI: interruzioni e trap.
 Per il docente: La presentazione originale elenca l'overflow aritmetico tra gli errori di programma: in RISC-V l'overflow intero non solleva eccezioni (Lezione 05). ecall, environment call, è sincrona rispetto al programma che la esegue.</a:t>
             </a:r>
@@ -841,7 +841,7 @@
           <a:p>
             <a:r>
               <a:rPr lang="en-US" dirty="0"/>
-              <a:t>La procedura generale in sei passi. Salvare il contesto, parte hardware: almeno l'indirizzo da cui riprendere. Identificare la causa. Saltare al punto d'ingresso della routine di servizio dell'interruzione. Salvare il contesto, parte software: i registri che la routine sta per usare. Servire l'interruzione. Infine ripristinare il contesto e riprendere il programma sospeso dall'istruzione successiva all'ultima eseguita. Il contesto è tutto ciò che il programma interrotto deve ritrovare immutato.
+              <a:t>La procedura generale in sei passi. Salvare il contesto, parte hardware: come minimo l'indirizzo a cui riprendere. Identificare la causa. Saltare al punto di ingresso della routine di servizio dell'interruzione. Salvare il contesto, parte software: i registri che la routine userà. Servire l'interruzione. Infine ripristinare il contesto e riprendere il programma sospeso all'istruzione successiva all'ultima eseguita. Il contesto è tutto ciò che il programma interrotto ha bisogno di ritrovare invariato, e la sua conservazione è ciò che rende invisibile l'interruzione.
 DA COMPRENDERE OGGI: interruzioni e trap.
 Per il docente: Gestione delle interruzioni. Lo stato da salvare e ripristinare: PC, stato, e i registri. Il salvataggio si può fare in parte o del tutto in hardware o in software; RISC-V fa il minimo in hardware. Con più dispositivi il processore deve identificare chi ha interrotto e, per richieste simultanee, applicare una priorità.</a:t>
             </a:r>
@@ -931,7 +931,7 @@
           <a:p>
             <a:r>
               <a:rPr lang="en-US" dirty="0"/>
-              <a:t>Sei registri. mtvec, scritto una volta dal firmware, contiene l'indirizzo del gestore delle trap. mstatus contiene MIE, l'abilitazione globale delle interruzioni, e MPIE, il suo valore precedente. mie ha un bit di abilitazione per ogni sorgente, mip un bit di richiesta in attesa per ogni sorgente. mepc riceve, a ogni trap, l'indirizzo dell'istruzione interrotta. mcause riceve la causa. La colonna centrale è importante: alcuni registri li scrive il firmware per configurare il meccanismo, altri l'hardware quando avviene una trap.
+              <a:t>Sei registri. mtvec, scritto una volta dal firmware, contiene l'indirizzo del gestore delle trap. mstatus contiene MIE, l'abilitazione globale delle interruzioni, e MPIE, il suo valore precedente. mie contiene un bit di abilitazione per sorgente, mip un bit di attesa per sorgente. mepc riceve, a ogni trap, l'indirizzo dell'istruzione interrotta. mcause riceve la causa. La colonna centrale merita attenzione: alcuni registri sono scritti dal firmware per configurare il meccanismo, altri dall'hardware quando avviene una trap.
 DA COMPRENDERE OGGI: interruzioni e trap.
 Per il docente: Registri di controllo e stato del modo macchina (Lezione 18). Un'interruzione viene accolta solo se il suo bit è a 1 sia in mip sia in mie e MIE vale 1.</a:t>
             </a:r>
@@ -1021,7 +1021,7 @@
           <a:p>
             <a:r>
               <a:rPr lang="en-US" dirty="0"/>
-              <a:t>Che cosa fa l'hardware a una trap, in ordine. Scrive in mepc l'indirizzo dell'istruzione interrotta. Scrive la causa in mcause. Copia MIE in MPIE e azzera MIE, così le altre interruzioni sono disabilitate. Passa al modo macchina. Carica nel PC l'indirizzo contenuto in mtvec. Nulla viene salvato su uno stack: i registri generici sono lasciati al gestore. L'istruzione mret, alla fine del gestore, annulla tutto: MIE riprende il valore di MPIE e il PC quello di mepc.
+              <a:t>Le azioni dell'hardware a una trap, nell'ordine. Scrive in mepc l'indirizzo dell'istruzione interrotta. Scrive la causa in mcause. Copia MIE in MPIE e azzera MIE, disabilitando ulteriori interruzioni. Entra nel modo macchina. Carica il PC con l'indirizzo contenuto in mtvec. Nulla viene salvato su uno stack: i registri generali sono lasciati al gestore, coerentemente con l'assenza di stato nascosto notata nella Lezione 18. L'istruzione mret, alla fine del gestore, annulla tutto: MIE riprende MPIE e il PC riprende mepc.
 DA COMPRENDERE OGGI: interruzioni e trap.
 Per il docente: L'hardware non mette nulla su uno stack: il salvataggio dei registri generici è lasciato al gestore. È il «salvataggio hardware del contesto» dello schema generale, ridotto a due registri e un bit.</a:t>
             </a:r>
@@ -1111,7 +1111,7 @@
           <a:p>
             <a:r>
               <a:rPr lang="en-US" dirty="0"/>
-              <a:t>Il contenuto di mcause. Il bit più alto dice se è stata un'interruzione o un'eccezione; il resto è un codice. Le tre interruzioni, evidenziate: software, timer, ed esterna, cioè un dispositivo. Tra le eccezioni: istruzione illegale, breakpoint, errore di accesso in un load o in uno store, ed ecall. Lo stesso numero può comparire in entrambe le famiglie con significati diversi, ed è per questo che serve il bit più alto. La riga del breakpoint spiega come un debugger, per esempio quello di PRG32-QT, ferma il vostro programma.
+              <a:t>Il contenuto di mcause. Il bit più alto indica se la trap è stata un'interruzione o un'eccezione; i bit restanti sono un codice. Le tre interruzioni, evidenziate, sono software, timer ed esterna, cioè un dispositivo. Tra le eccezioni ci sono istruzione non valida, breakpoint, errore di accesso in un caricamento o in una memorizzazione, ed ecall. Lo stesso numero può comparire in entrambe le famiglie con significati diversi, ed è per questo che serve il bit più alto. La riga del breakpoint spiega come un debugger come quello di PRG32-QT ferma un programma.
 DA COMPRENDERE OGGI: interruzioni e trap.
 Per il docente: I codici standard della specifica privilegiata; i chip ne aggiungono di propri. Lo stesso codice 3 significa cose diverse per interruzioni ed eccezioni: le distingue il bit più alto di mcause. Con mtvec in modo vettorizzato, un'interruzione del timer entra a base + 4 x 7.</a:t>
             </a:r>
@@ -1201,7 +1201,7 @@
           <a:p>
             <a:r>
               <a:rPr lang="en-US" dirty="0"/>
-              <a:t>Tutto questo succede sul kit. Un timer interrompe il processore cento volte al secondo, e il firmware lo usa per tenere il tempo e cadenzare i frame. Il display e l'audio interrompono quando vogliono altri dati. La radio interrompe quando arriva un pacchetto, ed è per questo che potete caricare una cartuccia mentre un gioco è in esecuzione. Le vostre init, update e draw sono normali funzioni che girano tra un'interruzione e l'altra. E una cartuccia bloccata in un ciclo non ferma le interruzioni: PRG32-QT segnala un errore; sulla scheda un watchdog segnala lo stallo.
+              <a:t>Tutto questo avviene sul kit. Un timer interrompe il processore cento volte al secondo, e il firmware lo usa per tenere il tempo e scandire i frame. Il display e l'audio interrompono quando chiedono altri dati. La radio interrompe quando arriva un pacchetto, ed è per questo che si può caricare una cartuccia mentre un gioco è in esecuzione. Le funzioni init, update e draw sono funzioni ordinarie eseguite tra un'interruzione e l'altra. E una cartuccia bloccata in un ciclo non ferma le interruzioni: PRG32-QT segnala un errore, e sulla scheda un watchdog segnala il blocco.
 DA COMPRENDERE OGGI: interruzioni e trap.
 Per il docente: I tre problemi del ciclo semplice (I/O inefficiente, programmi fuori controllo, controllo limitato) e la loro soluzione, tutti visibili sul kit. Verificato sui sorgenti e sulla configurazione del firmware (non su una scheda fisica): la cartuccia gira in modo nativo dentro il task principale, nello stesso modo di privilegio del firmware; FreeRTOS ha un tick a 100 Hz; il task watchdog (5 s, sorveglia il task idle) stampa soltanto un avviso sulla porta seriale, perché l'opzione panic è spenta, quindi una cartuccia bloccata trattiene il lock della cartuccia e il kit va resettato. Una cartuccia che disabilitasse le interruzioni farebbe invece scattare l'interrupt watchdog (300 ms), che va in panic e riavvia il chip. Eseguito su PRG32-QT: un ciclo senza fine dà «instruction budget exhausted», una scrittura in mstatus dà «unsupported CSR». In PRG32-QT un breakpoint è l'eccezione con codice 3.</a:t>
             </a:r>
@@ -1291,8 +1291,8 @@
           <a:p>
             <a:r>
               <a:rPr lang="en-US" dirty="0"/>
-              <a:t>Riguardate la slide dei formati: un campo sta nello stesso posto in tutte e quattro le righe.
-Gli indirizzi contano i byte. Quanti byte occupa un'istruzione di 32 bit?
+              <a:t>Per la prima domanda si torna alla slide dei formati: un campo occupa la stessa posizione in tutte e quattro le righe.
+Per la seconda: gli indirizzi contano i byte, e la domanda è quanti byte occupa un'istruzione a 32 bit.
 Per il docente: 1. Risposta: B. I bit da 6 a 0, in ogni formato: il processore sa sempre dove guardare per prima cosa.
 2. Risposta: C. Gli indirizzi contano i byte e un'istruzione è lunga quattro byte.</a:t>
             </a:r>
@@ -1382,8 +1382,8 @@
           <a:p>
             <a:r>
               <a:rPr lang="en-US" dirty="0"/>
-              <a:t>Sono in gioco quattro registri: uno contiene l'indirizzo del gestore, uno la causa, uno l'indirizzo da cui riprendere. ra appartiene alle chiamate di funzione, non alle trap.
-Usate la definizione: un'eccezione è causata dall'istruzione in esecuzione, un'interruzione viene dall'esterno in un momento arbitrario. Tre dei quattro eventi vengono dall'esterno.
+              <a:t>Per la prima domanda sono coinvolti quattro registri: uno contiene l'indirizzo del gestore, uno la causa, uno l'indirizzo a cui riprendere. ra appartiene alle chiamate di procedura, non alle trap.
+Per la seconda vale la definizione: un'eccezione è causata dall'istruzione in esecuzione, mentre un'interruzione arriva da fuori in un momento arbitrario. Tre dei quattro eventi nascono fuori dal programma.
 Per il docente: 1. Risposta: C. mepc, scritto dall'hardware alla trap e usato da mret. mtvec contiene l'indirizzo del gestore.
 2. Risposta: C. È causata dall'istruzione in esecuzione, in modo sincrono; le altre vengono dall'esterno, in un momento qualunque.</a:t>
             </a:r>
@@ -1473,7 +1473,7 @@
           <a:p>
             <a:r>
               <a:rPr lang="en-US" dirty="0"/>
-              <a:t>Dodici termini. Operation code è il codice operativo; addressing mode è il modo di indirizzamento. Fetch, decode ed execute sono prelievo, decodifica ed esecuzione. La interrupt service routine è la routine che serve un'interruzione. La interrupt latency, latenza di interruzione, è il ritardo tra la richiesta e l'inizio del lavoro utile. To mask, mascherare un'interruzione, significa impedire temporaneamente che venga accolta.</a:t>
+              <a:t>Dodici termini. L'operation code è il codice operativo; un addressing mode è un modo di indirizzamento. Fetch, decode ed execute sono prelievo, decodifica ed esecuzione. L'interrupt service routine è la routine che serve un'interruzione. La latenza di interruzione è il ritardo tra la richiesta e l'inizio del lavoro utile. Mascherare un'interruzione significa impedirne temporaneamente l'accettazione.</a:t>
             </a:r>
             <a:endParaRPr lang="en-US" dirty="0"/>
           </a:p>
@@ -1561,7 +1561,7 @@
           <a:p>
             <a:r>
               <a:rPr lang="en-US" dirty="0"/>
-              <a:t>Sei obiettivi. Descrivere un'istruzione come codice operativo con operandi. Decodificare a mano un'istruzione RISC-V. Seguire un'istruzione nelle cinque fasi del ciclo del processore. Spiegare che cos'è una pipeline e perché accelera un processore. Definire interruzione, eccezione e trap, tre parole che RISC-V usa con precisione. E descrivere che cosa fa l'hardware a una trap e come riprende il programma interrotto.</a:t>
+              <a:t>Sei risultati di apprendimento. Descrivere un'istruzione come codice operativo con i suoi operandi. Decodificare a mano un'istruzione RISC-V. Seguire un'istruzione attraverso le cinque fasi del ciclo del processore. Spiegare che cos'è una pipeline e perché aumenta il throughput. Definire interruzione, eccezione e trap, tre termini che RISC-V usa con precisione. E descrivere che cosa fa l'hardware a una trap e come riprende il programma interrotto.</a:t>
             </a:r>
             <a:endParaRPr lang="en-US" dirty="0"/>
           </a:p>
@@ -1649,7 +1649,7 @@
           <a:p>
             <a:r>
               <a:rPr lang="en-US" dirty="0"/>
-              <a:t>Cinque conclusioni. Un'istruzione è un codice operativo con i suoi operandi; in RISC-V sempre 32 bit in sei formati regolari. La lunghezza fissa rende semplice il prelievo: il PC avanza di una costante, 4 per un'istruzione non compressa. Il processore ha un ciclo: preleva, decodifica, esegue, scrive il risultato. Gli eventi eccezionali spezzano il ciclo: il processore salva dov'era, serve l'evento e riprende. Le interruzioni si possono abilitare, mascherare e ordinare per priorità, e RISC-V lo fa con una manciata di registri e mret. La prossima lezione lascia il processore per i bus e la scheda video.
+              <a:t>Cinque conclusioni. Un'istruzione è un codice operativo con i suoi operandi; in RISC-V è sempre lunga 32 bit, in sei formati regolari, salvo le forme compresse. Una lunghezza fissa mantiene semplice il prelievo: il PC avanza di una costante, 4 per un'istruzione non compressa. Il processore esegue un ciclo: prelievo, decodifica, esecuzione, scrittura del risultato. Gli eventi eccezionali interrompono il ciclo: il processore registra dove si trovava, serve l'evento e riprende. Le interruzioni si possono abilitare, mascherare e ordinare per priorità, e RISC-V ottiene tutto questo con una manciata di registri e mret. La prossima lezione lascia il processore per i bus e la scheda video.
 Stato di apprendimento, riepilogo. DA COMPRENDERE OGGI: formati delle istruzioni; i modi di indirizzamento; il ciclo del processore; interruzioni e trap. DA UTILIZZARE OGGI: il programma completo, gli strumenti di PRG32 (si usa, non si studia, in questo corso). DA COMPRENDERE PIÙ AVANTI: niente. Una slide senza etichetta è contesto: una storia, un esempio, una domanda, un esercizio.
 Per il docente: Le conclusioni originali affermavano che «l'interrupt è un segnale non mascherabile»: la maggior parte delle interruzioni si può mascherare; solo poche no. Prossima lezione: i bus e la scheda video.</a:t>
             </a:r>
@@ -1739,7 +1739,7 @@
           <a:p>
             <a:r>
               <a:rPr lang="en-US" dirty="0"/>
-              <a:t>Ogni processore ha quattro famiglie di istruzioni: trasferimenti tra memoria e registri, aritmetica e logica, controllo del flusso, ingresso/uscita. Un'istruzione è un codice operativo, l'opcode, che dice che cosa fare, seguito da zero o più operandi, che dicono su che cosa. Un operando può essere una costante scritta dentro l'istruzione, un immediato; una locazione di memoria; oppure un registro. Alcuni operandi sono impliciti: una macchina ad accumulatore non nomina l'accumulatore. Le istruzioni hanno da zero a tre operandi.
+              <a:t>Ogni processore fornisce quattro famiglie di istruzioni: trasferimenti tra memoria e registri, operazioni aritmetiche e logiche, controllo del flusso e ingresso/uscita. Un'istruzione consiste di un codice operativo, l'opcode, che specifica che cosa fare, seguito da zero o più operandi, che specificano su che cosa. Un operando può essere una costante scritta dentro l'istruzione, un immediato; una locazione di memoria; o un registro. Alcuni operandi sono impliciti, come l'accumulatore in una macchina ad accumulatore. Le istruzioni hanno da zero a tre operandi.
 DA COMPRENDERE OGGI: formati delle istruzioni.
 Per il docente: In RISC-V la quarta famiglia non esiste come tale: i dispositivi sono memoria (Lezione 15). add ha tre operandi, tutti registri; ret non ne ha di visibili.</a:t>
             </a:r>
@@ -1829,7 +1829,7 @@
           <a:p>
             <a:r>
               <a:rPr lang="en-US" dirty="0"/>
-              <a:t>I formati di RISC-V. Tutte le istruzioni sono lunghe 32 bit, divisi in campi. Nel formato R, per le operazioni tra registri, ci sono tre numeri di registro di cinque bit, rs1, rs2 e rd, e tre campi che selezionano l'operazione. Nel formato I il secondo registro sorgente è sostituito da un immediato di 12 bit. S e B, per store e salti condizionati, spezzano l'immediato in due parti. U e J portano un immediato di 20 bit. Notate la regolarità: l'opcode sta sempre nei sette bit più bassi, e i registri sempre nelle stesse posizioni.
+              <a:t>I formati delle istruzioni RISC-V. Ogni istruzione è lunga 32 bit e divisa in campi. Nel formato R, per le operazioni tra registri, ci sono tre numeri di registro di cinque bit, rs1, rs2 e rd, e tre campi che selezionano l'operazione. Nel formato I il secondo registro sorgente è sostituito da un immediato di 12 bit. S e B, per memorizzazioni e salti condizionati, dividono l'immediato in due parti. U e J portano un immediato di 20 bit. La regolarità è un obiettivo di progetto: l'opcode occupa sempre i sette bit più bassi e i campi registro sempre le stesse posizioni, così la decodifica può cominciare prima di conoscere il formato. Le forme compresse a 16 bit dell'estensione C sono qui solo nominate; l'Appendice A del libro le elenca.
 DA COMPRENDERE OGGI: formati delle istruzioni.
 Per il docente: Bit da 31 a 0, da sinistra a destra (indici mostrati sulla prima riga). B e J differiscono da S e U solo per come sono disposti i bit dell'immediato. Questa regolarità è il cuore dell'idea RISC; i formati generici a 0, 1, 2 e 3 operandi della presentazione originale ne sono gli antenati.</a:t>
             </a:r>
@@ -1919,7 +1919,7 @@
           <a:p>
             <a:r>
               <a:rPr lang="en-US" dirty="0"/>
-              <a:t>Un modo di indirizzamento è un modo di trovare un operando. RISC-V ne ha quattro. Immediato: l'operando è una costante dentro l'istruzione. Registro: è il contenuto di un registro. Base più scostamento: è la parola di memoria all'indirizzo dato da un registro più una costante, l'unico modo di raggiungere la memoria. Relativo al PC: un indirizzo a una certa distanza dall'istruzione stessa, usato dai salti. L'indirizzamento indiretto in memoria, in cui l'indirizzo stesso sta in memoria, non esiste: richiede due load.
+              <a:t>Un modo di indirizzamento è un metodo per trovare un operando. RISC-V ne fornisce quattro. Immediato: l'operando è una costante dentro l'istruzione. A registro: è il contenuto di un registro. Base più spiazzamento: è la parola di memoria all'indirizzo formato da un registro più una costante, l'unico modo di raggiungere la memoria. Relativo al PC: un indirizzo a una data distanza dall'istruzione stessa, usato dai salti. L'indirizzamento indiretto in memoria, in cui l'indirizzo stesso risiede in memoria, non esiste: richiede due caricamenti. È la trattazione formale promessa nella Lezione 02, quando si distinsero per la prima volta indirizzo e valore.
 DA COMPRENDERE OGGI: i modi di indirizzamento.
 Per il docente: RISC-V ha solo i primi quattro. Un processore CISC come l'MC68000 ne ha una dozzina, compresi i modi indiretti in memoria e con autoincremento. L'esempio della presentazione originale, R3 := M[M[A]], in RISC-V diventa: lw t0, 0(t1) seguita da lw t0, 0(t0). La fase di «operand assembly» di un processore CISC è il prezzo dei modi di indirizzamento ricchi.</a:t>
             </a:r>
@@ -2009,7 +2009,7 @@
           <a:p>
             <a:r>
               <a:rPr lang="en-US" dirty="0"/>
-              <a:t>Cinque fasi. Prelievo (fetch): l'istruzione all'indirizzo contenuto nel PC viene letta dalla memoria, e il PC avanza. Decodifica: l'opcode viene riconosciuto e i registri nominati nell'istruzione vengono letti. Esecuzione: la ALU calcola un risultato, un indirizzo o un confronto. Memoria: i load leggono la memoria, gli store la scrivono, le altre istruzioni qui non fanno nulla. Scrittura (write back): il risultato viene scritto nel registro di destinazione. Dopo il bootstrap iniziale, il processore ripete questo ciclo all'infinito.
+              <a:t>Cinque fasi. Prelievo: l'istruzione all'indirizzo contenuto nel PC viene letta dalla memoria e il PC fatto avanzare. Decodifica: si riconosce l'opcode e si leggono i registri nominati nell'istruzione. Esecuzione: la ALU calcola un risultato, un indirizzo o un confronto. Memoria: i caricamenti leggono la memoria, le memorizzazioni la scrivono, e le altre istruzioni in questa fase non fanno nulla. Scrittura del risultato: il risultato viene scritto nel registro destinazione. Dopo l'avvio iniziale il processore ripete questo ciclo all'infinito.
 DA COMPRENDERE OGGI: il ciclo del processore.
 Per il docente: Algoritmo fondamentale del processore: inizializzazione, instruction fetch and decoding, operand assembly, execute. La versione a cinque fasi è la formulazione RISC classica. In inglese: fetch, decode, execute, memory, write back.</a:t>
             </a:r>
@@ -2099,7 +2099,7 @@
           <a:p>
             <a:r>
               <a:rPr lang="en-US" dirty="0"/>
-              <a:t>Se ogni fase ha il proprio hardware, le fasi di istruzioni diverse possono sovrapporsi. Nella tabella ogni riga è un'istruzione e ogni colonna un ciclo di clock: mentre la prima istruzione è in esecuzione, la seconda viene decodificata e la terza prelevata. Ogni istruzione impiega ancora cinque cicli, ma a ogni ciclo ne termina una: è la pipeline, la stessa idea di una catena di montaggio. I processori superscalari affiancano più pipeline. Il core principale del kit ha una pipeline a quattro stadi.
+              <a:t>Se ogni fase ha hardware dedicato, le fasi di istruzioni successive si possono sovrapporre. Nella tabella ogni riga è un'istruzione e ogni colonna un ciclo di clock: mentre la prima istruzione è in esecuzione, la seconda viene decodificata e la terza prelevata. Ogni istruzione richiede ancora cinque cicli, ma se ne completa una per ciclo: è la pipeline, il principio della catena di montaggio, che aumenta il throughput senza ridurre la latenza. I processori superscalari affiancano più pipeline, come mostra la Lezione 24. Il core principale del kit ha una pipeline a quattro stadi.
 DA COMPRENDERE OGGI: il ciclo del processore.
 Per il docente: Slide di origine: «Esempio di pipeline lineare a 5 stadi; superscalarità». IF instruction fetch (prelievo), ID decode (decodifica), EX execute (esecuzione), MEM memory (memoria), WB write back (scrittura). I salti e le dipendenze tra istruzioni vicine complicano il quadro (hazard): è l'argomento di un corso avanzato.</a:t>
             </a:r>
@@ -2189,7 +2189,7 @@
           <a:p>
             <a:r>
               <a:rPr lang="en-US" dirty="0"/>
-              <a:t>Un processore che facesse solo prelievo, decodifica ed esecuzione avrebbe tre problemi. La comunicazione con i dispositivi sarebbe inefficiente: il programma dovrebbe chiedere di continuo a ogni dispositivo se ha qualcosa da dire. Un programma entrato per errore in un ciclo senza fine, come il j loop della slide, non potrebbe mai essere rimosso. E il sistema operativo avrebbe poco controllo sulla macchina. Tutti e tre hanno la stessa soluzione: un modo per togliere il processore al programma in esecuzione.
+              <a:t>Un processore che non facesse altro che prelevare, decodificare ed eseguire avrebbe tre problemi. La comunicazione con i dispositivi sarebbe inefficiente, perché il programma dovrebbe interrogare ripetutamente ogni dispositivo. Un programma intrappolato per errore in un ciclo infinito, come il j loop della slide, non potrebbe mai essere rimosso. E il sistema operativo avrebbe scarso controllo sulla macchina. Tutti e tre hanno una sola soluzione: un meccanismo per sottrarre il processore al programma in esecuzione.
 DA COMPRENDERE OGGI: interruzioni e trap.
 Per il docente: Slide di origine: «Ciclo del processore semplificato»: bootstrap, fetch, operand assembly, execute.</a:t>
             </a:r>
@@ -2279,7 +2279,7 @@
           <a:p>
             <a:r>
               <a:rPr lang="en-US" dirty="0"/>
-              <a:t>La definizione: le interruzioni sono eventi eccezionali, di solito asincroni rispetto al programma in esecuzione, che richiedono l'attenzione del processore. RISC-V usa tre parole distinte. Un'interruzione (interrupt) viene dall'esterno del programma, in un momento qualunque: un timer, un dispositivo. Un'eccezione è causata dall'istruzione in esecuzione: un opcode illegale, un indirizzo vietato. Una trap è il trasferimento del controllo a un gestore, qualunque ne sia la causa. Altri processori usano queste parole con meno rigore.
+              <a:t>La definizione: le interruzioni sono eventi eccezionali, di solito asincroni rispetto al programma in esecuzione, che richiedono l'attenzione del processore. RISC-V distingue tre termini. Un'interruzione nasce fuori dal programma e può arrivare in qualsiasi momento: un timer, un dispositivo. Un'eccezione è causata dall'istruzione in esecuzione: un opcode non valido, un indirizzo vietato. Una trap è il trasferimento del controllo a un gestore, qualunque ne sia la causa. Altre architetture usano queste parole con meno rigore, quindi l'uso di RISC-V conviene adottarlo per la sua chiarezza.
 DA COMPRENDERE OGGI: interruzioni e trap.
 Per il docente: Interrupt o interruzioni. I processori più vecchi e la presentazione originale chiamano «trap» gli eventi sincroni e usano «interrupt» per tutto; la specifica RISC-V usa le tre parole con precisione.</a:t>
             </a:r>
@@ -3359,7 +3359,7 @@
                 <a:ea typeface="Calibri" pitchFamily="34" charset="-122"/>
                 <a:cs typeface="Calibri" pitchFamily="34" charset="-120"/>
               </a:rPr>
-              <a:t>19-Architettura_dei_Calcolatori-Istruzioni_e_Interruzioni-Codice.pptx</a:t>
+              <a:t>19-Architettura_dei_Calcolatori-Istruzioni_e_Interruzioni-Lab.pptx</a:t>
             </a:r>
             <a:endParaRPr lang="en-US" sz="1300" dirty="0"/>
           </a:p>

--- a/it/slides/19-Architettura_dei_Calcolatori-Istruzioni_e_Interruzioni.pptx
+++ b/it/slides/19-Architettura_dei_Calcolatori-Istruzioni_e_Interruzioni.pptx
@@ -126,26 +126,26 @@
   <p:extLst>
     <p:ext uri="{521415D9-36F7-43E2-AB2F-B90AF26B5E84}">
       <p14:sectionLst xmlns:p14="http://schemas.microsoft.com/office/powerpoint/2010/main">
-        <p14:section name="Apertura" id="{6d0dbdf5-bf46-7c94-bb0b-e0c2dc988d5f}">
+        <p14:section name="Apertura" id="{ca8c5c5f-897d-9245-709e-b527d05501d3}">
           <p14:sldIdLst>
             <p14:sldId id="256"/>
             <p14:sldId id="257"/>
           </p14:sldIdLst>
         </p14:section>
-        <p14:section name="Istruzioni" id="{5bb200c5-edec-efcb-701f-e97b2803317b}">
+        <p14:section name="Istruzioni" id="{33ecd78b-cc11-7c08-d8ca-29e44dcecd60}">
           <p14:sldIdLst>
             <p14:sldId id="258"/>
             <p14:sldId id="259"/>
             <p14:sldId id="260"/>
           </p14:sldIdLst>
         </p14:section>
-        <p14:section name="Il ciclo del processore" id="{2de7192d-c318-5725-016c-64d6038f1ca9}">
+        <p14:section name="Il ciclo del processore" id="{2f2053aa-6c9b-17cf-e482-0b938f0bbd4e}">
           <p14:sldIdLst>
             <p14:sldId id="261"/>
             <p14:sldId id="262"/>
           </p14:sldIdLst>
         </p14:section>
-        <p14:section name="Interruzioni" id="{60f5737e-6bc2-07a0-086e-c953dfc29faf}">
+        <p14:section name="Interruzioni" id="{380ad4e5-c07d-fd6f-f167-53140affdbb0}">
           <p14:sldIdLst>
             <p14:sldId id="263"/>
             <p14:sldId id="264"/>
@@ -154,7 +154,7 @@
             <p14:sldId id="267"/>
           </p14:sldIdLst>
         </p14:section>
-        <p14:section name="La soluzione di RISC-V" id="{a7dd7187-8cde-6fab-194a-0201ee65603e}">
+        <p14:section name="La soluzione di RISC-V" id="{0435607c-9576-463d-dad4-6c5d3169c73c}">
           <p14:sldIdLst>
             <p14:sldId id="268"/>
             <p14:sldId id="269"/>

--- a/it/slides/19-Architettura_dei_Calcolatori-Istruzioni_e_Interruzioni.pptx
+++ b/it/slides/19-Architettura_dei_Calcolatori-Istruzioni_e_Interruzioni.pptx
@@ -126,26 +126,26 @@
   <p:extLst>
     <p:ext uri="{521415D9-36F7-43E2-AB2F-B90AF26B5E84}">
       <p14:sectionLst xmlns:p14="http://schemas.microsoft.com/office/powerpoint/2010/main">
-        <p14:section name="Apertura" id="{ca8c5c5f-897d-9245-709e-b527d05501d3}">
+        <p14:section name="Apertura" id="{6194e81f-db4d-4759-4a02-f3fdcc8fcbc9}">
           <p14:sldIdLst>
             <p14:sldId id="256"/>
             <p14:sldId id="257"/>
           </p14:sldIdLst>
         </p14:section>
-        <p14:section name="Istruzioni" id="{33ecd78b-cc11-7c08-d8ca-29e44dcecd60}">
+        <p14:section name="Istruzioni" id="{1557e957-4277-fc22-f45e-e85c843754aa}">
           <p14:sldIdLst>
             <p14:sldId id="258"/>
             <p14:sldId id="259"/>
             <p14:sldId id="260"/>
           </p14:sldIdLst>
         </p14:section>
-        <p14:section name="Il ciclo del processore" id="{2f2053aa-6c9b-17cf-e482-0b938f0bbd4e}">
+        <p14:section name="Il ciclo del processore" id="{f005385c-fa34-b642-4c10-ead9e9e3f201}">
           <p14:sldIdLst>
             <p14:sldId id="261"/>
             <p14:sldId id="262"/>
           </p14:sldIdLst>
         </p14:section>
-        <p14:section name="Interruzioni" id="{380ad4e5-c07d-fd6f-f167-53140affdbb0}">
+        <p14:section name="Interruzioni" id="{d9f2913d-e760-ba53-7ea2-3b64565b742d}">
           <p14:sldIdLst>
             <p14:sldId id="263"/>
             <p14:sldId id="264"/>
@@ -154,7 +154,7 @@
             <p14:sldId id="267"/>
           </p14:sldIdLst>
         </p14:section>
-        <p14:section name="La soluzione di RISC-V" id="{0435607c-9576-463d-dad4-6c5d3169c73c}">
+        <p14:section name="La soluzione di RISC-V" id="{1ef1ae46-6054-0f12-a637-19d8983b0e93}">
           <p14:sldIdLst>
             <p14:sldId id="268"/>
             <p14:sldId id="269"/>
@@ -573,6 +573,7 @@
               <a:t>La lezione precedente ha descritto di che cosa è fatto un processore; questa descrive che cosa fa. Ha due metà. La prima segue una singola istruzione: come è codificata in 32 bit e quali passi compie il processore per eseguirla. La seconda spiega che cosa accade quando arriva qualcosa di più urgente del programma corrente, un timer, un dispositivo o un errore, così che il processore debba sospendere il suo lavoro e riprenderlo più tardi. Le due metà sono collegate: l'interruzione è una modifica proprio del ciclo che la prima metà descrive. La battuta in copertina, come si vedrà, è quasi letteralmente vera.
 Stato di apprendimento: DA COMPRENDERE OGGI, alla fine di questa lezione lo spiegate, lo seguite passo passo e lo applicate da soli; DA UTILIZZARE OGGI, oggi seguite e usate la ricetta; come funziona dentro si spiega più avanti, o non fa parte del corso; DA COMPRENDERE PIÙ AVANTI, riconoscete il nome e lo scopo; lo spiega una lezione successiva. Una slide senza etichetta è contesto: una storia, un esempio, una domanda, un esercizio.
 Stato di apprendimento di questa lezione. DA COMPRENDERE OGGI: formati delle istruzioni; i modi di indirizzamento; il ciclo del processore; interruzioni e trap. DA UTILIZZARE OGGI: il programma completo, gli strumenti di PRG32 (si usa, non si studia, in questo corso). DA COMPRENDERE PIÙ AVANTI: niente. Una slide senza etichetta è contesto: una storia, un esempio, una domanda, un esercizio.
+Percorso. I risultati di oggi: (1) decodificare un'istruzione RISC-V nei suoi campi; (2) nominare il modo di indirizzamento di ogni operando; (3) descrivere il ciclo dell'istruzione e che cosa cambia un'interruzione. Si appoggia su: solo ciò che ha preparato la Lezione 01. Prossimo passo: Lezione 20, I bus e la scheda video.
 Per il docente: La presentazione originale usava una macchina a parole di 16 bit per la fase di fetch e il Motorola MC68000 per interruzioni vettorizzate e priorità. Entrambi sono sostituiti da RISC-V: i sei formati di istruzione, i cinque stadi classici, e il meccanismo delle trap in modo macchina (mtvec, mepc, mcause, mstatus, mret). Una slide di confronto conserva il 68000 come controparte storica.</a:t>
             </a:r>
             <a:endParaRPr lang="en-US" dirty="0"/>
@@ -1650,7 +1651,7 @@
             <a:r>
               <a:rPr lang="en-US" dirty="0"/>
               <a:t>Cinque conclusioni. Un'istruzione è un codice operativo con i suoi operandi; in RISC-V è sempre lunga 32 bit, in sei formati regolari, salvo le forme compresse. Una lunghezza fissa mantiene semplice il prelievo: il PC avanza di una costante, 4 per un'istruzione non compressa. Il processore esegue un ciclo: prelievo, decodifica, esecuzione, scrittura del risultato. Gli eventi eccezionali interrompono il ciclo: il processore registra dove si trovava, serve l'evento e riprende. Le interruzioni si possono abilitare, mascherare e ordinare per priorità, e RISC-V ottiene tutto questo con una manciata di registri e mret. La prossima lezione lascia il processore per i bus e la scheda video.
-Stato di apprendimento, riepilogo. DA COMPRENDERE OGGI: formati delle istruzioni; i modi di indirizzamento; il ciclo del processore; interruzioni e trap. DA UTILIZZARE OGGI: il programma completo, gli strumenti di PRG32 (si usa, non si studia, in questo corso). DA COMPRENDERE PIÙ AVANTI: niente. Una slide senza etichetta è contesto: una storia, un esempio, una domanda, un esercizio.
+Stato di apprendimento, riepilogo. DA COMPRENDERE OGGI: formati delle istruzioni; i modi di indirizzamento; il ciclo del processore; interruzioni e trap. DA UTILIZZARE OGGI: il programma completo, gli strumenti di PRG32 (si usa, non si studia, in questo corso). DA COMPRENDERE PIÙ AVANTI: niente. Una slide senza etichetta è contesto: una storia, un esempio, una domanda, un esercizio. Il filo della lezione: Il numero 0x00130313 della Lezione 02 si legge ora campo per campo, e il processore che lo preleva può essere interrotto e ripreso. Prossimo passo: i dispositivi che il processore serve. Biglietto d'uscita (da due a quattro minuti, da soli, su carta): 1. Nominate il modo di indirizzamento di: l'1 in addi t1, t1, 1; la parola letta da lw t1, 8(sp); la destinazione di beq t0, t1, loop; l'operando t0 di add t2, t0, t1. 2. Arriva un'interruzione mentre il processore sta eseguendo un'istruzione. Che cosa succede a quell'istruzione, quale registro ricorda dove riprendere, e come termina il gestore?
 Per il docente: Le conclusioni originali affermavano che «l'interrupt è un segnale non mascherabile»: la maggior parte delle interruzioni si può mascherare; solo poche no. Prossima lezione: i bus e la scheda video.</a:t>
             </a:r>
             <a:endParaRPr lang="en-US" dirty="0"/>
